--- a/docs/cadastro_de_itens.pptx
+++ b/docs/cadastro_de_itens.pptx
@@ -18,9 +18,10 @@
     <p:sldId id="266" r:id="rId12"/>
     <p:sldId id="267" r:id="rId13"/>
     <p:sldId id="268" r:id="rId14"/>
+    <p:sldId id="269" r:id="rId15"/>
   </p:sldIdLst>
   <p:notesMasterIdLst>
-    <p:notesMasterId r:id="rId15"/>
+    <p:notesMasterId r:id="rId16"/>
   </p:notesMasterIdLst>
   <p:sldSz cx="12192000" cy="6858000"/>
   <p:notesSz cx="6858000" cy="12192000"/>
@@ -778,7 +779,7 @@
           <a:p>
             <a:r>
               <a:rPr lang="en-US" dirty="0"/>
-              <a:t/>
+              <a:t>Ponto central para a banca: a IA nao decide conta nem imobilizacao. Ela decide o subgrupo; o resto e regra.</a:t>
             </a:r>
             <a:endParaRPr lang="en-US" dirty="0"/>
           </a:p>
@@ -890,6 +891,94 @@
             <a:fld id="{F7021451-1387-4CA6-816F-3879F97B5CBC}" type="slidenum">
               <a:rPr lang="en-US"/>
               <a:t>13</a:t>
+            </a:fld>
+            <a:endParaRPr lang="en-US"/>
+          </a:p>
+        </p:txBody>
+      </p:sp>
+    </p:spTree>
+    <p:extLst>
+      <p:ext uri="{BB962C8B-B14F-4D97-AF65-F5344CB8AC3E}">
+        <p14:creationId xmlns:p14="http://schemas.microsoft.com/office/powerpoint/2010/main" val="1024086991"/>
+      </p:ext>
+    </p:extLst>
+  </p:cSld>
+  <p:clrMapOvr>
+    <a:masterClrMapping/>
+  </p:clrMapOvr>
+</p:notes>
+</file>
+
+<file path=ppt/notesSlides/notesSlide14.xml><?xml version="1.0" encoding="utf-8"?>
+<p:notes xmlns:a="http://schemas.openxmlformats.org/drawingml/2006/main" xmlns:r="http://schemas.openxmlformats.org/officeDocument/2006/relationships" xmlns:p="http://schemas.openxmlformats.org/presentationml/2006/main">
+  <p:cSld>
+    <p:spTree>
+      <p:nvGrpSpPr>
+        <p:cNvPr id="1" name=""/>
+        <p:cNvGrpSpPr/>
+        <p:nvPr/>
+      </p:nvGrpSpPr>
+      <p:grpSpPr>
+        <a:xfrm>
+          <a:off x="0" y="0"/>
+          <a:ext cx="0" cy="0"/>
+          <a:chOff x="0" y="0"/>
+          <a:chExt cx="0" cy="0"/>
+        </a:xfrm>
+      </p:grpSpPr>
+      <p:sp>
+        <p:nvSpPr>
+          <p:cNvPr id="2" name="Slide Image Placeholder 1"/>
+          <p:cNvSpPr>
+            <a:spLocks noGrp="1" noRot="1" noChangeAspect="1"/>
+          </p:cNvSpPr>
+          <p:nvPr>
+            <p:ph type="sldImg"/>
+          </p:nvPr>
+        </p:nvSpPr>
+        <p:spPr/>
+      </p:sp>
+      <p:sp>
+        <p:nvSpPr>
+          <p:cNvPr id="3" name="Notes Placeholder 2"/>
+          <p:cNvSpPr>
+            <a:spLocks noGrp="1"/>
+          </p:cNvSpPr>
+          <p:nvPr>
+            <p:ph type="body" idx="1"/>
+          </p:nvPr>
+        </p:nvSpPr>
+        <p:spPr/>
+        <p:txBody>
+          <a:bodyPr/>
+          <a:lstStyle/>
+          <a:p>
+            <a:r>
+              <a:rPr lang="en-US" dirty="0"/>
+              <a:t/>
+            </a:r>
+            <a:endParaRPr lang="en-US" dirty="0"/>
+          </a:p>
+        </p:txBody>
+      </p:sp>
+      <p:sp>
+        <p:nvSpPr>
+          <p:cNvPr id="4" name="Slide Number Placeholder 3"/>
+          <p:cNvSpPr>
+            <a:spLocks noGrp="1"/>
+          </p:cNvSpPr>
+          <p:nvPr>
+            <p:ph type="sldNum" sz="quarter" idx="10"/>
+          </p:nvPr>
+        </p:nvSpPr>
+        <p:spPr/>
+        <p:txBody>
+          <a:bodyPr/>
+          <a:lstStyle/>
+          <a:p>
+            <a:fld id="{F7021451-1387-4CA6-816F-3879F97B5CBC}" type="slidenum">
+              <a:rPr lang="en-US"/>
+              <a:t>14</a:t>
             </a:fld>
             <a:endParaRPr lang="en-US"/>
           </a:p>
@@ -3268,8 +3357,8 @@
         </p:nvSpPr>
         <p:spPr>
           <a:xfrm>
-            <a:off x="804672" y="2487168"/>
-            <a:ext cx="3017520" cy="411480"/>
+            <a:off x="804672" y="2414016"/>
+            <a:ext cx="3017520" cy="384048"/>
           </a:xfrm>
           <a:prstGeom prst="rect">
             <a:avLst/>
@@ -3286,7 +3375,7 @@
               <a:buChar char="•"/>
             </a:pPr>
             <a:r>
-              <a:rPr lang="en-US" sz="1200" dirty="0">
+              <a:rPr lang="en-US" sz="1150" dirty="0">
                 <a:solidFill>
                   <a:srgbClr val="1F2933"/>
                 </a:solidFill>
@@ -3296,7 +3385,7 @@
               </a:rPr>
               <a:t>Produto ou serviço</a:t>
             </a:r>
-            <a:endParaRPr lang="en-US" sz="1200" dirty="0"/>
+            <a:endParaRPr lang="en-US" sz="1150" dirty="0"/>
           </a:p>
         </p:txBody>
       </p:sp>
@@ -3308,8 +3397,8 @@
         </p:nvSpPr>
         <p:spPr>
           <a:xfrm>
-            <a:off x="804672" y="2971800"/>
-            <a:ext cx="3017520" cy="411480"/>
+            <a:off x="804672" y="2816352"/>
+            <a:ext cx="3017520" cy="384048"/>
           </a:xfrm>
           <a:prstGeom prst="rect">
             <a:avLst/>
@@ -3326,7 +3415,7 @@
               <a:buChar char="•"/>
             </a:pPr>
             <a:r>
-              <a:rPr lang="en-US" sz="1200" dirty="0">
+              <a:rPr lang="en-US" sz="1150" dirty="0">
                 <a:solidFill>
                   <a:srgbClr val="1F2933"/>
                 </a:solidFill>
@@ -3336,7 +3425,7 @@
               </a:rPr>
               <a:t>Descrição do item</a:t>
             </a:r>
-            <a:endParaRPr lang="en-US" sz="1200" dirty="0"/>
+            <a:endParaRPr lang="en-US" sz="1150" dirty="0"/>
           </a:p>
         </p:txBody>
       </p:sp>
@@ -3348,8 +3437,8 @@
         </p:nvSpPr>
         <p:spPr>
           <a:xfrm>
-            <a:off x="804672" y="3456432"/>
-            <a:ext cx="3017520" cy="411480"/>
+            <a:off x="804672" y="3218688"/>
+            <a:ext cx="3017520" cy="384048"/>
           </a:xfrm>
           <a:prstGeom prst="rect">
             <a:avLst/>
@@ -3366,7 +3455,7 @@
               <a:buChar char="•"/>
             </a:pPr>
             <a:r>
-              <a:rPr lang="en-US" sz="1200" dirty="0">
+              <a:rPr lang="en-US" sz="1150" dirty="0">
                 <a:solidFill>
                   <a:srgbClr val="1F2933"/>
                 </a:solidFill>
@@ -3376,7 +3465,7 @@
               </a:rPr>
               <a:t>Aplicação e setor</a:t>
             </a:r>
-            <a:endParaRPr lang="en-US" sz="1200" dirty="0"/>
+            <a:endParaRPr lang="en-US" sz="1150" dirty="0"/>
           </a:p>
         </p:txBody>
       </p:sp>
@@ -3388,8 +3477,8 @@
         </p:nvSpPr>
         <p:spPr>
           <a:xfrm>
-            <a:off x="804672" y="3941064"/>
-            <a:ext cx="3017520" cy="411480"/>
+            <a:off x="804672" y="3621024"/>
+            <a:ext cx="3017520" cy="384048"/>
           </a:xfrm>
           <a:prstGeom prst="rect">
             <a:avLst/>
@@ -3406,7 +3495,7 @@
               <a:buChar char="•"/>
             </a:pPr>
             <a:r>
-              <a:rPr lang="en-US" sz="1200" dirty="0">
+              <a:rPr lang="en-US" sz="1150" dirty="0">
                 <a:solidFill>
                   <a:srgbClr val="1F2933"/>
                 </a:solidFill>
@@ -3414,9 +3503,9 @@
                 <a:ea typeface="Calibri" pitchFamily="34" charset="-122"/>
                 <a:cs typeface="Calibri" pitchFamily="34" charset="-120"/>
               </a:rPr>
-              <a:t>Entra em estoque?</a:t>
-            </a:r>
-            <a:endParaRPr lang="en-US" sz="1200" dirty="0"/>
+              <a:t>NCM da nota, se tiver</a:t>
+            </a:r>
+            <a:endParaRPr lang="en-US" sz="1150" dirty="0"/>
           </a:p>
         </p:txBody>
       </p:sp>
@@ -3428,8 +3517,8 @@
         </p:nvSpPr>
         <p:spPr>
           <a:xfrm>
-            <a:off x="804672" y="4425696"/>
-            <a:ext cx="3017520" cy="411480"/>
+            <a:off x="804672" y="4023360"/>
+            <a:ext cx="3017520" cy="384048"/>
           </a:xfrm>
           <a:prstGeom prst="rect">
             <a:avLst/>
@@ -3446,7 +3535,7 @@
               <a:buChar char="•"/>
             </a:pPr>
             <a:r>
-              <a:rPr lang="en-US" sz="1200" dirty="0">
+              <a:rPr lang="en-US" sz="1150" dirty="0">
                 <a:solidFill>
                   <a:srgbClr val="1F2933"/>
                 </a:solidFill>
@@ -3454,9 +3543,9 @@
                 <a:ea typeface="Calibri" pitchFamily="34" charset="-122"/>
                 <a:cs typeface="Calibri" pitchFamily="34" charset="-120"/>
               </a:rPr>
-              <a:t>Valor unitário</a:t>
-            </a:r>
-            <a:endParaRPr lang="en-US" sz="1200" dirty="0"/>
+              <a:t>Entra em estoque?</a:t>
+            </a:r>
+            <a:endParaRPr lang="en-US" sz="1150" dirty="0"/>
           </a:p>
         </p:txBody>
       </p:sp>
@@ -3468,8 +3557,8 @@
         </p:nvSpPr>
         <p:spPr>
           <a:xfrm>
-            <a:off x="804672" y="4910328"/>
-            <a:ext cx="3017520" cy="411480"/>
+            <a:off x="804672" y="4425696"/>
+            <a:ext cx="3017520" cy="384048"/>
           </a:xfrm>
           <a:prstGeom prst="rect">
             <a:avLst/>
@@ -3486,7 +3575,7 @@
               <a:buChar char="•"/>
             </a:pPr>
             <a:r>
-              <a:rPr lang="en-US" sz="1200" dirty="0">
+              <a:rPr lang="en-US" sz="1150" dirty="0">
                 <a:solidFill>
                   <a:srgbClr val="1F2933"/>
                 </a:solidFill>
@@ -3494,15 +3583,55 @@
                 <a:ea typeface="Calibri" pitchFamily="34" charset="-122"/>
                 <a:cs typeface="Calibri" pitchFamily="34" charset="-120"/>
               </a:rPr>
+              <a:t>Valor unitário</a:t>
+            </a:r>
+            <a:endParaRPr lang="en-US" sz="1150" dirty="0"/>
+          </a:p>
+        </p:txBody>
+      </p:sp>
+      <p:sp>
+        <p:nvSpPr>
+          <p:cNvPr id="13" name="Text 11"/>
+          <p:cNvSpPr txBox="1"/>
+          <p:nvPr/>
+        </p:nvSpPr>
+        <p:spPr>
+          <a:xfrm>
+            <a:off x="804672" y="4828032"/>
+            <a:ext cx="3017520" cy="384048"/>
+          </a:xfrm>
+          <a:prstGeom prst="rect">
+            <a:avLst/>
+          </a:prstGeom>
+          <a:noFill/>
+          <a:ln/>
+        </p:spPr>
+        <p:txBody>
+          <a:bodyPr wrap="square" lIns="0" tIns="0" rIns="0" bIns="0" rtlCol="0" anchor="ctr"/>
+          <a:lstStyle/>
+          <a:p>
+            <a:pPr marL="342900" indent="-342900">
+              <a:buSzPct val="100000"/>
+              <a:buChar char="•"/>
+            </a:pPr>
+            <a:r>
+              <a:rPr lang="en-US" sz="1150" dirty="0">
+                <a:solidFill>
+                  <a:srgbClr val="1F2933"/>
+                </a:solidFill>
+                <a:latin typeface="Calibri" pitchFamily="34" charset="0"/>
+                <a:ea typeface="Calibri" pitchFamily="34" charset="-122"/>
+                <a:cs typeface="Calibri" pitchFamily="34" charset="-120"/>
+              </a:rPr>
               <a:t>Orçamento em PDF (opcional)</a:t>
             </a:r>
-            <a:endParaRPr lang="en-US" sz="1200" dirty="0"/>
-          </a:p>
-        </p:txBody>
-      </p:sp>
-      <p:sp>
-        <p:nvSpPr>
-          <p:cNvPr id="13" name="Shape 11"/>
+            <a:endParaRPr lang="en-US" sz="1150" dirty="0"/>
+          </a:p>
+        </p:txBody>
+      </p:sp>
+      <p:sp>
+        <p:nvSpPr>
+          <p:cNvPr id="14" name="Shape 12"/>
           <p:cNvSpPr/>
           <p:nvPr/>
         </p:nvSpPr>
@@ -3529,7 +3658,7 @@
       </p:sp>
       <p:sp>
         <p:nvSpPr>
-          <p:cNvPr id="14" name="Shape 12"/>
+          <p:cNvPr id="15" name="Shape 13"/>
           <p:cNvSpPr/>
           <p:nvPr/>
         </p:nvSpPr>
@@ -3551,7 +3680,7 @@
       </p:sp>
       <p:sp>
         <p:nvSpPr>
-          <p:cNvPr id="15" name="Text 13"/>
+          <p:cNvPr id="16" name="Text 14"/>
           <p:cNvSpPr txBox="1"/>
           <p:nvPr/>
         </p:nvSpPr>
@@ -3590,14 +3719,14 @@
       </p:sp>
       <p:sp>
         <p:nvSpPr>
-          <p:cNvPr id="16" name="Text 14"/>
-          <p:cNvSpPr txBox="1"/>
-          <p:nvPr/>
-        </p:nvSpPr>
-        <p:spPr>
-          <a:xfrm>
-            <a:off x="4599432" y="2487168"/>
-            <a:ext cx="3017520" cy="411480"/>
+          <p:cNvPr id="17" name="Text 15"/>
+          <p:cNvSpPr txBox="1"/>
+          <p:nvPr/>
+        </p:nvSpPr>
+        <p:spPr>
+          <a:xfrm>
+            <a:off x="4599432" y="2414016"/>
+            <a:ext cx="3017520" cy="384048"/>
           </a:xfrm>
           <a:prstGeom prst="rect">
             <a:avLst/>
@@ -3614,7 +3743,7 @@
               <a:buChar char="•"/>
             </a:pPr>
             <a:r>
-              <a:rPr lang="en-US" sz="1200" dirty="0">
+              <a:rPr lang="en-US" sz="1150" dirty="0">
                 <a:solidFill>
                   <a:srgbClr val="1F2933"/>
                 </a:solidFill>
@@ -3624,20 +3753,20 @@
               </a:rPr>
               <a:t>Filtra os tipos pela natureza</a:t>
             </a:r>
-            <a:endParaRPr lang="en-US" sz="1200" dirty="0"/>
-          </a:p>
-        </p:txBody>
-      </p:sp>
-      <p:sp>
-        <p:nvSpPr>
-          <p:cNvPr id="17" name="Text 15"/>
-          <p:cNvSpPr txBox="1"/>
-          <p:nvPr/>
-        </p:nvSpPr>
-        <p:spPr>
-          <a:xfrm>
-            <a:off x="4599432" y="2971800"/>
-            <a:ext cx="3017520" cy="411480"/>
+            <a:endParaRPr lang="en-US" sz="1150" dirty="0"/>
+          </a:p>
+        </p:txBody>
+      </p:sp>
+      <p:sp>
+        <p:nvSpPr>
+          <p:cNvPr id="18" name="Text 16"/>
+          <p:cNvSpPr txBox="1"/>
+          <p:nvPr/>
+        </p:nvSpPr>
+        <p:spPr>
+          <a:xfrm>
+            <a:off x="4599432" y="2816352"/>
+            <a:ext cx="3017520" cy="384048"/>
           </a:xfrm>
           <a:prstGeom prst="rect">
             <a:avLst/>
@@ -3654,7 +3783,7 @@
               <a:buChar char="•"/>
             </a:pPr>
             <a:r>
-              <a:rPr lang="en-US" sz="1200" dirty="0">
+              <a:rPr lang="en-US" sz="1150" dirty="0">
                 <a:solidFill>
                   <a:srgbClr val="1F2933"/>
                 </a:solidFill>
@@ -3662,22 +3791,22 @@
                 <a:ea typeface="Calibri" pitchFamily="34" charset="-122"/>
                 <a:cs typeface="Calibri" pitchFamily="34" charset="-120"/>
               </a:rPr>
-              <a:t>Busca itens semelhantes já validados</a:t>
-            </a:r>
-            <a:endParaRPr lang="en-US" sz="1200" dirty="0"/>
-          </a:p>
-        </p:txBody>
-      </p:sp>
-      <p:sp>
-        <p:nvSpPr>
-          <p:cNvPr id="18" name="Text 16"/>
-          <p:cNvSpPr txBox="1"/>
-          <p:nvPr/>
-        </p:nvSpPr>
-        <p:spPr>
-          <a:xfrm>
-            <a:off x="4599432" y="3456432"/>
-            <a:ext cx="3017520" cy="411480"/>
+              <a:t>Consulta itens que você já aprovou</a:t>
+            </a:r>
+            <a:endParaRPr lang="en-US" sz="1150" dirty="0"/>
+          </a:p>
+        </p:txBody>
+      </p:sp>
+      <p:sp>
+        <p:nvSpPr>
+          <p:cNvPr id="19" name="Text 17"/>
+          <p:cNvSpPr txBox="1"/>
+          <p:nvPr/>
+        </p:nvSpPr>
+        <p:spPr>
+          <a:xfrm>
+            <a:off x="4599432" y="3218688"/>
+            <a:ext cx="3017520" cy="384048"/>
           </a:xfrm>
           <a:prstGeom prst="rect">
             <a:avLst/>
@@ -3694,7 +3823,7 @@
               <a:buChar char="•"/>
             </a:pPr>
             <a:r>
-              <a:rPr lang="en-US" sz="1200" dirty="0">
+              <a:rPr lang="en-US" sz="1150" dirty="0">
                 <a:solidFill>
                   <a:srgbClr val="1F2933"/>
                 </a:solidFill>
@@ -3704,20 +3833,20 @@
               </a:rPr>
               <a:t>Aplica a taxonomia e as regras</a:t>
             </a:r>
-            <a:endParaRPr lang="en-US" sz="1200" dirty="0"/>
-          </a:p>
-        </p:txBody>
-      </p:sp>
-      <p:sp>
-        <p:nvSpPr>
-          <p:cNvPr id="19" name="Text 17"/>
-          <p:cNvSpPr txBox="1"/>
-          <p:nvPr/>
-        </p:nvSpPr>
-        <p:spPr>
-          <a:xfrm>
-            <a:off x="4599432" y="3941064"/>
-            <a:ext cx="3017520" cy="411480"/>
+            <a:endParaRPr lang="en-US" sz="1150" dirty="0"/>
+          </a:p>
+        </p:txBody>
+      </p:sp>
+      <p:sp>
+        <p:nvSpPr>
+          <p:cNvPr id="20" name="Text 18"/>
+          <p:cNvSpPr txBox="1"/>
+          <p:nvPr/>
+        </p:nvSpPr>
+        <p:spPr>
+          <a:xfrm>
+            <a:off x="4599432" y="3621024"/>
+            <a:ext cx="3017520" cy="384048"/>
           </a:xfrm>
           <a:prstGeom prst="rect">
             <a:avLst/>
@@ -3734,7 +3863,7 @@
               <a:buChar char="•"/>
             </a:pPr>
             <a:r>
-              <a:rPr lang="en-US" sz="1200" dirty="0">
+              <a:rPr lang="en-US" sz="1150" dirty="0">
                 <a:solidFill>
                   <a:srgbClr val="1F2933"/>
                 </a:solidFill>
@@ -3742,22 +3871,22 @@
                 <a:ea typeface="Calibri" pitchFamily="34" charset="-122"/>
                 <a:cs typeface="Calibri" pitchFamily="34" charset="-120"/>
               </a:rPr>
-              <a:t>Testa os critérios de imobilização</a:t>
-            </a:r>
-            <a:endParaRPr lang="en-US" sz="1200" dirty="0"/>
-          </a:p>
-        </p:txBody>
-      </p:sp>
-      <p:sp>
-        <p:nvSpPr>
-          <p:cNvPr id="20" name="Text 18"/>
-          <p:cNvSpPr txBox="1"/>
-          <p:nvPr/>
-        </p:nvSpPr>
-        <p:spPr>
-          <a:xfrm>
-            <a:off x="4599432" y="4425696"/>
-            <a:ext cx="3017520" cy="411480"/>
+              <a:t>Confere o NCM informado, ou busca dentro do capítulo</a:t>
+            </a:r>
+            <a:endParaRPr lang="en-US" sz="1150" dirty="0"/>
+          </a:p>
+        </p:txBody>
+      </p:sp>
+      <p:sp>
+        <p:nvSpPr>
+          <p:cNvPr id="21" name="Text 19"/>
+          <p:cNvSpPr txBox="1"/>
+          <p:nvPr/>
+        </p:nvSpPr>
+        <p:spPr>
+          <a:xfrm>
+            <a:off x="4599432" y="4023360"/>
+            <a:ext cx="3017520" cy="384048"/>
           </a:xfrm>
           <a:prstGeom prst="rect">
             <a:avLst/>
@@ -3774,7 +3903,7 @@
               <a:buChar char="•"/>
             </a:pPr>
             <a:r>
-              <a:rPr lang="en-US" sz="1200" dirty="0">
+              <a:rPr lang="en-US" sz="1150" dirty="0">
                 <a:solidFill>
                   <a:srgbClr val="1F2933"/>
                 </a:solidFill>
@@ -3782,15 +3911,15 @@
                 <a:ea typeface="Calibri" pitchFamily="34" charset="-122"/>
                 <a:cs typeface="Calibri" pitchFamily="34" charset="-120"/>
               </a:rPr>
-              <a:t>Procura o NCM ou o código de serviço</a:t>
-            </a:r>
-            <a:endParaRPr lang="en-US" sz="1200" dirty="0"/>
-          </a:p>
-        </p:txBody>
-      </p:sp>
-      <p:sp>
-        <p:nvSpPr>
-          <p:cNvPr id="21" name="Shape 19"/>
+              <a:t>Deriva classe, conta e imobilização</a:t>
+            </a:r>
+            <a:endParaRPr lang="en-US" sz="1150" dirty="0"/>
+          </a:p>
+        </p:txBody>
+      </p:sp>
+      <p:sp>
+        <p:nvSpPr>
+          <p:cNvPr id="22" name="Shape 20"/>
           <p:cNvSpPr/>
           <p:nvPr/>
         </p:nvSpPr>
@@ -3817,7 +3946,7 @@
       </p:sp>
       <p:sp>
         <p:nvSpPr>
-          <p:cNvPr id="22" name="Shape 20"/>
+          <p:cNvPr id="23" name="Shape 21"/>
           <p:cNvSpPr/>
           <p:nvPr/>
         </p:nvSpPr>
@@ -3839,7 +3968,7 @@
       </p:sp>
       <p:sp>
         <p:nvSpPr>
-          <p:cNvPr id="23" name="Text 21"/>
+          <p:cNvPr id="24" name="Text 22"/>
           <p:cNvSpPr txBox="1"/>
           <p:nvPr/>
         </p:nvSpPr>
@@ -3878,14 +4007,14 @@
       </p:sp>
       <p:sp>
         <p:nvSpPr>
-          <p:cNvPr id="24" name="Text 22"/>
-          <p:cNvSpPr txBox="1"/>
-          <p:nvPr/>
-        </p:nvSpPr>
-        <p:spPr>
-          <a:xfrm>
-            <a:off x="8394192" y="2487168"/>
-            <a:ext cx="3017520" cy="411480"/>
+          <p:cNvPr id="25" name="Text 23"/>
+          <p:cNvSpPr txBox="1"/>
+          <p:nvPr/>
+        </p:nvSpPr>
+        <p:spPr>
+          <a:xfrm>
+            <a:off x="8394192" y="2414016"/>
+            <a:ext cx="3017520" cy="384048"/>
           </a:xfrm>
           <a:prstGeom prst="rect">
             <a:avLst/>
@@ -3902,7 +4031,7 @@
               <a:buChar char="•"/>
             </a:pPr>
             <a:r>
-              <a:rPr lang="en-US" sz="1200" dirty="0">
+              <a:rPr lang="en-US" sz="1150" dirty="0">
                 <a:solidFill>
                   <a:srgbClr val="1F2933"/>
                 </a:solidFill>
@@ -3912,20 +4041,20 @@
               </a:rPr>
               <a:t>Tipo, grupo, subgrupo e classe</a:t>
             </a:r>
-            <a:endParaRPr lang="en-US" sz="1200" dirty="0"/>
-          </a:p>
-        </p:txBody>
-      </p:sp>
-      <p:sp>
-        <p:nvSpPr>
-          <p:cNvPr id="25" name="Text 23"/>
-          <p:cNvSpPr txBox="1"/>
-          <p:nvPr/>
-        </p:nvSpPr>
-        <p:spPr>
-          <a:xfrm>
-            <a:off x="8394192" y="2971800"/>
-            <a:ext cx="3017520" cy="411480"/>
+            <a:endParaRPr lang="en-US" sz="1150" dirty="0"/>
+          </a:p>
+        </p:txBody>
+      </p:sp>
+      <p:sp>
+        <p:nvSpPr>
+          <p:cNvPr id="26" name="Text 24"/>
+          <p:cNvSpPr txBox="1"/>
+          <p:nvPr/>
+        </p:nvSpPr>
+        <p:spPr>
+          <a:xfrm>
+            <a:off x="8394192" y="2816352"/>
+            <a:ext cx="3017520" cy="384048"/>
           </a:xfrm>
           <a:prstGeom prst="rect">
             <a:avLst/>
@@ -3942,7 +4071,7 @@
               <a:buChar char="•"/>
             </a:pPr>
             <a:r>
-              <a:rPr lang="en-US" sz="1200" dirty="0">
+              <a:rPr lang="en-US" sz="1150" dirty="0">
                 <a:solidFill>
                   <a:srgbClr val="1F2933"/>
                 </a:solidFill>
@@ -3952,20 +4081,20 @@
               </a:rPr>
               <a:t>Conta contábil com descrição</a:t>
             </a:r>
-            <a:endParaRPr lang="en-US" sz="1200" dirty="0"/>
-          </a:p>
-        </p:txBody>
-      </p:sp>
-      <p:sp>
-        <p:nvSpPr>
-          <p:cNvPr id="26" name="Text 24"/>
-          <p:cNvSpPr txBox="1"/>
-          <p:nvPr/>
-        </p:nvSpPr>
-        <p:spPr>
-          <a:xfrm>
-            <a:off x="8394192" y="3456432"/>
-            <a:ext cx="3017520" cy="411480"/>
+            <a:endParaRPr lang="en-US" sz="1150" dirty="0"/>
+          </a:p>
+        </p:txBody>
+      </p:sp>
+      <p:sp>
+        <p:nvSpPr>
+          <p:cNvPr id="27" name="Text 25"/>
+          <p:cNvSpPr txBox="1"/>
+          <p:nvPr/>
+        </p:nvSpPr>
+        <p:spPr>
+          <a:xfrm>
+            <a:off x="8394192" y="3218688"/>
+            <a:ext cx="3017520" cy="384048"/>
           </a:xfrm>
           <a:prstGeom prst="rect">
             <a:avLst/>
@@ -3982,7 +4111,7 @@
               <a:buChar char="•"/>
             </a:pPr>
             <a:r>
-              <a:rPr lang="en-US" sz="1200" dirty="0">
+              <a:rPr lang="en-US" sz="1150" dirty="0">
                 <a:solidFill>
                   <a:srgbClr val="1F2933"/>
                 </a:solidFill>
@@ -3992,20 +4121,20 @@
               </a:rPr>
               <a:t>NCM ou código de serviço</a:t>
             </a:r>
-            <a:endParaRPr lang="en-US" sz="1200" dirty="0"/>
-          </a:p>
-        </p:txBody>
-      </p:sp>
-      <p:sp>
-        <p:nvSpPr>
-          <p:cNvPr id="27" name="Text 25"/>
-          <p:cNvSpPr txBox="1"/>
-          <p:nvPr/>
-        </p:nvSpPr>
-        <p:spPr>
-          <a:xfrm>
-            <a:off x="8394192" y="3941064"/>
-            <a:ext cx="3017520" cy="411480"/>
+            <a:endParaRPr lang="en-US" sz="1150" dirty="0"/>
+          </a:p>
+        </p:txBody>
+      </p:sp>
+      <p:sp>
+        <p:nvSpPr>
+          <p:cNvPr id="28" name="Text 26"/>
+          <p:cNvSpPr txBox="1"/>
+          <p:nvPr/>
+        </p:nvSpPr>
+        <p:spPr>
+          <a:xfrm>
+            <a:off x="8394192" y="3621024"/>
+            <a:ext cx="3017520" cy="384048"/>
           </a:xfrm>
           <a:prstGeom prst="rect">
             <a:avLst/>
@@ -4022,7 +4151,7 @@
               <a:buChar char="•"/>
             </a:pPr>
             <a:r>
-              <a:rPr lang="en-US" sz="1200" dirty="0">
+              <a:rPr lang="en-US" sz="1150" dirty="0">
                 <a:solidFill>
                   <a:srgbClr val="1F2933"/>
                 </a:solidFill>
@@ -4032,20 +4161,20 @@
               </a:rPr>
               <a:t>Decisão de imobilização</a:t>
             </a:r>
-            <a:endParaRPr lang="en-US" sz="1200" dirty="0"/>
-          </a:p>
-        </p:txBody>
-      </p:sp>
-      <p:sp>
-        <p:nvSpPr>
-          <p:cNvPr id="28" name="Text 26"/>
-          <p:cNvSpPr txBox="1"/>
-          <p:nvPr/>
-        </p:nvSpPr>
-        <p:spPr>
-          <a:xfrm>
-            <a:off x="8394192" y="4425696"/>
-            <a:ext cx="3017520" cy="411480"/>
+            <a:endParaRPr lang="en-US" sz="1150" dirty="0"/>
+          </a:p>
+        </p:txBody>
+      </p:sp>
+      <p:sp>
+        <p:nvSpPr>
+          <p:cNvPr id="29" name="Text 27"/>
+          <p:cNvSpPr txBox="1"/>
+          <p:nvPr/>
+        </p:nvSpPr>
+        <p:spPr>
+          <a:xfrm>
+            <a:off x="8394192" y="4023360"/>
+            <a:ext cx="3017520" cy="384048"/>
           </a:xfrm>
           <a:prstGeom prst="rect">
             <a:avLst/>
@@ -4062,7 +4191,7 @@
               <a:buChar char="•"/>
             </a:pPr>
             <a:r>
-              <a:rPr lang="en-US" sz="1200" dirty="0">
+              <a:rPr lang="en-US" sz="1150" dirty="0">
                 <a:solidFill>
                   <a:srgbClr val="1F2933"/>
                 </a:solidFill>
@@ -4070,15 +4199,15 @@
                 <a:ea typeface="Calibri" pitchFamily="34" charset="-122"/>
                 <a:cs typeface="Calibri" pitchFamily="34" charset="-120"/>
               </a:rPr>
-              <a:t>Justificativa e grau de confiança</a:t>
-            </a:r>
-            <a:endParaRPr lang="en-US" sz="1200" dirty="0"/>
-          </a:p>
-        </p:txBody>
-      </p:sp>
-      <p:sp>
-        <p:nvSpPr>
-          <p:cNvPr id="29" name="Shape 27"/>
+              <a:t>Status do que precisa conferir</a:t>
+            </a:r>
+            <a:endParaRPr lang="en-US" sz="1150" dirty="0"/>
+          </a:p>
+        </p:txBody>
+      </p:sp>
+      <p:sp>
+        <p:nvSpPr>
+          <p:cNvPr id="30" name="Shape 28"/>
           <p:cNvSpPr/>
           <p:nvPr/>
         </p:nvSpPr>
@@ -4105,7 +4234,7 @@
       </p:sp>
       <p:sp>
         <p:nvSpPr>
-          <p:cNvPr id="30" name="Text 28"/>
+          <p:cNvPr id="31" name="Text 29"/>
           <p:cNvSpPr txBox="1"/>
           <p:nvPr/>
         </p:nvSpPr>
@@ -4144,7 +4273,7 @@
       </p:sp>
       <p:sp>
         <p:nvSpPr>
-          <p:cNvPr id="31" name="Text 29"/>
+          <p:cNvPr id="32" name="Text 30"/>
           <p:cNvSpPr txBox="1"/>
           <p:nvPr/>
         </p:nvSpPr>
@@ -4183,7 +4312,7 @@
       </p:sp>
       <p:sp>
         <p:nvSpPr>
-          <p:cNvPr id="32" name="Text 30"/>
+          <p:cNvPr id="33" name="Text 31"/>
           <p:cNvSpPr txBox="1"/>
           <p:nvPr/>
         </p:nvSpPr>
@@ -4285,7 +4414,7 @@
                 <a:ea typeface="Calibri" pitchFamily="34" charset="-122"/>
                 <a:cs typeface="Calibri" pitchFamily="34" charset="-120"/>
               </a:rPr>
-              <a:t>O MODELO DE EXEMPLO</a:t>
+              <a:t>CONFIABILIDADE</a:t>
             </a:r>
             <a:endParaRPr lang="en-US" sz="1200" dirty="0"/>
           </a:p>
@@ -4324,7 +4453,7 @@
                 <a:ea typeface="Cambria" pitchFamily="34" charset="-122"/>
                 <a:cs typeface="Cambria" pitchFamily="34" charset="-120"/>
               </a:rPr>
-              <a:t>A estrutura que acompanha o projeto</a:t>
+              <a:t>O que é regra e o que é o modelo decide</a:t>
             </a:r>
             <a:endParaRPr lang="en-US" sz="3000" dirty="0"/>
           </a:p>
@@ -4332,18 +4461,57 @@
       </p:sp>
       <p:sp>
         <p:nvSpPr>
-          <p:cNvPr id="4" name="Shape 2"/>
+          <p:cNvPr id="4" name="Text 2"/>
+          <p:cNvSpPr txBox="1"/>
+          <p:nvPr/>
+        </p:nvSpPr>
+        <p:spPr>
+          <a:xfrm>
+            <a:off x="548640" y="1325880"/>
+            <a:ext cx="11064240" cy="310896"/>
+          </a:xfrm>
+          <a:prstGeom prst="rect">
+            <a:avLst/>
+          </a:prstGeom>
+          <a:noFill/>
+          <a:ln/>
+        </p:spPr>
+        <p:txBody>
+          <a:bodyPr wrap="square" lIns="0" tIns="0" rIns="0" bIns="0" rtlCol="0" anchor="ctr"/>
+          <a:lstStyle/>
+          <a:p>
+            <a:pPr indent="0" marL="0">
+              <a:buNone/>
+            </a:pPr>
+            <a:r>
+              <a:rPr lang="en-US" sz="1250" dirty="0">
+                <a:solidFill>
+                  <a:srgbClr val="52606D"/>
+                </a:solidFill>
+                <a:latin typeface="Calibri" pitchFamily="34" charset="0"/>
+                <a:ea typeface="Calibri" pitchFamily="34" charset="-122"/>
+                <a:cs typeface="Calibri" pitchFamily="34" charset="-120"/>
+              </a:rPr>
+              <a:t>Três campos saíram das mãos do modelo. Eles não são palpite: decorrem do que você informou e da estrutura que a empresa definiu.</a:t>
+            </a:r>
+            <a:endParaRPr lang="en-US" sz="1250" dirty="0"/>
+          </a:p>
+        </p:txBody>
+      </p:sp>
+      <p:sp>
+        <p:nvSpPr>
+          <p:cNvPr id="5" name="Shape 3"/>
           <p:cNvSpPr/>
           <p:nvPr/>
         </p:nvSpPr>
         <p:spPr>
           <a:xfrm>
             <a:off x="548640" y="1783080"/>
-            <a:ext cx="3520440" cy="1600200"/>
+            <a:ext cx="5532120" cy="3291840"/>
           </a:xfrm>
           <a:prstGeom prst="roundRect">
             <a:avLst>
-              <a:gd name="adj" fmla="val 3429"/>
+              <a:gd name="adj" fmla="val 1667"/>
             </a:avLst>
           </a:prstGeom>
           <a:solidFill>
@@ -4359,96 +4527,508 @@
       </p:sp>
       <p:sp>
         <p:nvSpPr>
-          <p:cNvPr id="5" name="Text 3"/>
-          <p:cNvSpPr txBox="1"/>
-          <p:nvPr/>
-        </p:nvSpPr>
-        <p:spPr>
-          <a:xfrm>
-            <a:off x="868680" y="2020824"/>
-            <a:ext cx="2926080" cy="749808"/>
-          </a:xfrm>
-          <a:prstGeom prst="rect">
-            <a:avLst/>
-          </a:prstGeom>
-          <a:noFill/>
-          <a:ln/>
-        </p:spPr>
-        <p:txBody>
-          <a:bodyPr wrap="square" lIns="0" tIns="0" rIns="0" bIns="0" rtlCol="0" anchor="ctr"/>
-          <a:lstStyle/>
-          <a:p>
-            <a:pPr indent="0" marL="0">
-              <a:buNone/>
-            </a:pPr>
-            <a:r>
-              <a:rPr lang="en-US" sz="4800" b="1" dirty="0">
-                <a:solidFill>
-                  <a:srgbClr val="1F2933"/>
-                </a:solidFill>
-                <a:latin typeface="Cambria" pitchFamily="34" charset="0"/>
-                <a:ea typeface="Cambria" pitchFamily="34" charset="-122"/>
-                <a:cs typeface="Cambria" pitchFamily="34" charset="-120"/>
-              </a:rPr>
-              <a:t>3</a:t>
-            </a:r>
-            <a:endParaRPr lang="en-US" sz="4800" dirty="0"/>
-          </a:p>
-        </p:txBody>
-      </p:sp>
-      <p:sp>
-        <p:nvSpPr>
-          <p:cNvPr id="6" name="Text 4"/>
-          <p:cNvSpPr txBox="1"/>
-          <p:nvPr/>
-        </p:nvSpPr>
-        <p:spPr>
-          <a:xfrm>
-            <a:off x="868680" y="2825496"/>
-            <a:ext cx="2926080" cy="292608"/>
-          </a:xfrm>
-          <a:prstGeom prst="rect">
-            <a:avLst/>
-          </a:prstGeom>
-          <a:noFill/>
-          <a:ln/>
-        </p:spPr>
-        <p:txBody>
-          <a:bodyPr wrap="square" lIns="0" tIns="0" rIns="0" bIns="0" rtlCol="0" anchor="ctr"/>
-          <a:lstStyle/>
-          <a:p>
-            <a:pPr indent="0" marL="0">
-              <a:buNone/>
-            </a:pPr>
-            <a:r>
-              <a:rPr lang="en-US" sz="1300" dirty="0">
-                <a:solidFill>
-                  <a:srgbClr val="52606D"/>
-                </a:solidFill>
-                <a:latin typeface="Calibri" pitchFamily="34" charset="0"/>
-                <a:ea typeface="Calibri" pitchFamily="34" charset="-122"/>
-                <a:cs typeface="Calibri" pitchFamily="34" charset="-120"/>
-              </a:rPr>
-              <a:t>tipos de item</a:t>
-            </a:r>
-            <a:endParaRPr lang="en-US" sz="1300" dirty="0"/>
-          </a:p>
-        </p:txBody>
-      </p:sp>
-      <p:sp>
-        <p:nvSpPr>
-          <p:cNvPr id="7" name="Shape 5"/>
+          <p:cNvPr id="6" name="Shape 4"/>
           <p:cNvSpPr/>
           <p:nvPr/>
         </p:nvSpPr>
         <p:spPr>
           <a:xfrm>
-            <a:off x="4343400" y="1783080"/>
-            <a:ext cx="3520440" cy="1600200"/>
+            <a:off x="841248" y="2029968"/>
+            <a:ext cx="2286000" cy="347472"/>
           </a:xfrm>
           <a:prstGeom prst="roundRect">
             <a:avLst>
-              <a:gd name="adj" fmla="val 3429"/>
+              <a:gd name="adj" fmla="val 13158"/>
+            </a:avLst>
+          </a:prstGeom>
+          <a:solidFill>
+            <a:srgbClr val="1B7A55"/>
+          </a:solidFill>
+          <a:ln/>
+        </p:spPr>
+      </p:sp>
+      <p:sp>
+        <p:nvSpPr>
+          <p:cNvPr id="7" name="Text 5"/>
+          <p:cNvSpPr txBox="1"/>
+          <p:nvPr/>
+        </p:nvSpPr>
+        <p:spPr>
+          <a:xfrm>
+            <a:off x="841248" y="2103120"/>
+            <a:ext cx="2286000" cy="237744"/>
+          </a:xfrm>
+          <a:prstGeom prst="rect">
+            <a:avLst/>
+          </a:prstGeom>
+          <a:noFill/>
+          <a:ln/>
+        </p:spPr>
+        <p:txBody>
+          <a:bodyPr wrap="square" lIns="0" tIns="0" rIns="0" bIns="0" rtlCol="0" anchor="ctr"/>
+          <a:lstStyle/>
+          <a:p>
+            <a:pPr algn="ctr" indent="0" marL="0">
+              <a:buNone/>
+            </a:pPr>
+            <a:r>
+              <a:rPr lang="en-US" sz="1200" b="1" dirty="0">
+                <a:solidFill>
+                  <a:srgbClr val="FFFFFF"/>
+                </a:solidFill>
+                <a:latin typeface="Calibri" pitchFamily="34" charset="0"/>
+                <a:ea typeface="Calibri" pitchFamily="34" charset="-122"/>
+                <a:cs typeface="Calibri" pitchFamily="34" charset="-120"/>
+              </a:rPr>
+              <a:t>REGRA</a:t>
+            </a:r>
+            <a:endParaRPr lang="en-US" sz="1200" dirty="0"/>
+          </a:p>
+        </p:txBody>
+      </p:sp>
+      <p:sp>
+        <p:nvSpPr>
+          <p:cNvPr id="8" name="Text 6"/>
+          <p:cNvSpPr txBox="1"/>
+          <p:nvPr/>
+        </p:nvSpPr>
+        <p:spPr>
+          <a:xfrm>
+            <a:off x="3246120" y="2103120"/>
+            <a:ext cx="2651760" cy="237744"/>
+          </a:xfrm>
+          <a:prstGeom prst="rect">
+            <a:avLst/>
+          </a:prstGeom>
+          <a:noFill/>
+          <a:ln/>
+        </p:spPr>
+        <p:txBody>
+          <a:bodyPr wrap="square" lIns="0" tIns="0" rIns="0" bIns="0" rtlCol="0" anchor="ctr"/>
+          <a:lstStyle/>
+          <a:p>
+            <a:pPr indent="0" marL="0">
+              <a:buNone/>
+            </a:pPr>
+            <a:r>
+              <a:rPr lang="en-US" sz="1100" i="1" dirty="0">
+                <a:solidFill>
+                  <a:srgbClr val="52606D"/>
+                </a:solidFill>
+                <a:latin typeface="Calibri" pitchFamily="34" charset="0"/>
+                <a:ea typeface="Calibri" pitchFamily="34" charset="-122"/>
+                <a:cs typeface="Calibri" pitchFamily="34" charset="-120"/>
+              </a:rPr>
+              <a:t>sempre o mesmo resultado</a:t>
+            </a:r>
+            <a:endParaRPr lang="en-US" sz="1100" dirty="0"/>
+          </a:p>
+        </p:txBody>
+      </p:sp>
+      <p:sp>
+        <p:nvSpPr>
+          <p:cNvPr id="9" name="Text 7"/>
+          <p:cNvSpPr txBox="1"/>
+          <p:nvPr/>
+        </p:nvSpPr>
+        <p:spPr>
+          <a:xfrm>
+            <a:off x="859536" y="2560320"/>
+            <a:ext cx="1600200" cy="365760"/>
+          </a:xfrm>
+          <a:prstGeom prst="rect">
+            <a:avLst/>
+          </a:prstGeom>
+          <a:noFill/>
+          <a:ln/>
+        </p:spPr>
+        <p:txBody>
+          <a:bodyPr wrap="square" lIns="0" tIns="0" rIns="0" bIns="0" rtlCol="0" anchor="ctr"/>
+          <a:lstStyle/>
+          <a:p>
+            <a:pPr indent="0" marL="0">
+              <a:buNone/>
+            </a:pPr>
+            <a:r>
+              <a:rPr lang="en-US" sz="1200" b="1" dirty="0">
+                <a:solidFill>
+                  <a:srgbClr val="1F2933"/>
+                </a:solidFill>
+                <a:latin typeface="Calibri" pitchFamily="34" charset="0"/>
+                <a:ea typeface="Calibri" pitchFamily="34" charset="-122"/>
+                <a:cs typeface="Calibri" pitchFamily="34" charset="-120"/>
+              </a:rPr>
+              <a:t>Natureza</a:t>
+            </a:r>
+            <a:endParaRPr lang="en-US" sz="1200" dirty="0"/>
+          </a:p>
+        </p:txBody>
+      </p:sp>
+      <p:sp>
+        <p:nvSpPr>
+          <p:cNvPr id="10" name="Text 8"/>
+          <p:cNvSpPr txBox="1"/>
+          <p:nvPr/>
+        </p:nvSpPr>
+        <p:spPr>
+          <a:xfrm>
+            <a:off x="2514600" y="2560320"/>
+            <a:ext cx="3383280" cy="402336"/>
+          </a:xfrm>
+          <a:prstGeom prst="rect">
+            <a:avLst/>
+          </a:prstGeom>
+          <a:noFill/>
+          <a:ln/>
+        </p:spPr>
+        <p:txBody>
+          <a:bodyPr wrap="square" lIns="0" tIns="0" rIns="0" bIns="0" rtlCol="0" anchor="ctr"/>
+          <a:lstStyle/>
+          <a:p>
+            <a:pPr indent="0" marL="0">
+              <a:buNone/>
+            </a:pPr>
+            <a:r>
+              <a:rPr lang="en-US" sz="1150" dirty="0">
+                <a:solidFill>
+                  <a:srgbClr val="52606D"/>
+                </a:solidFill>
+                <a:latin typeface="Calibri" pitchFamily="34" charset="0"/>
+                <a:ea typeface="Calibri" pitchFamily="34" charset="-122"/>
+                <a:cs typeface="Calibri" pitchFamily="34" charset="-120"/>
+              </a:rPr>
+              <a:t>você responde</a:t>
+            </a:r>
+            <a:endParaRPr lang="en-US" sz="1150" dirty="0"/>
+          </a:p>
+        </p:txBody>
+      </p:sp>
+      <p:sp>
+        <p:nvSpPr>
+          <p:cNvPr id="11" name="Text 9"/>
+          <p:cNvSpPr txBox="1"/>
+          <p:nvPr/>
+        </p:nvSpPr>
+        <p:spPr>
+          <a:xfrm>
+            <a:off x="859536" y="3035808"/>
+            <a:ext cx="1600200" cy="365760"/>
+          </a:xfrm>
+          <a:prstGeom prst="rect">
+            <a:avLst/>
+          </a:prstGeom>
+          <a:noFill/>
+          <a:ln/>
+        </p:spPr>
+        <p:txBody>
+          <a:bodyPr wrap="square" lIns="0" tIns="0" rIns="0" bIns="0" rtlCol="0" anchor="ctr"/>
+          <a:lstStyle/>
+          <a:p>
+            <a:pPr indent="0" marL="0">
+              <a:buNone/>
+            </a:pPr>
+            <a:r>
+              <a:rPr lang="en-US" sz="1200" b="1" dirty="0">
+                <a:solidFill>
+                  <a:srgbClr val="1F2933"/>
+                </a:solidFill>
+                <a:latin typeface="Calibri" pitchFamily="34" charset="0"/>
+                <a:ea typeface="Calibri" pitchFamily="34" charset="-122"/>
+                <a:cs typeface="Calibri" pitchFamily="34" charset="-120"/>
+              </a:rPr>
+              <a:t>Classe</a:t>
+            </a:r>
+            <a:endParaRPr lang="en-US" sz="1200" dirty="0"/>
+          </a:p>
+        </p:txBody>
+      </p:sp>
+      <p:sp>
+        <p:nvSpPr>
+          <p:cNvPr id="12" name="Text 10"/>
+          <p:cNvSpPr txBox="1"/>
+          <p:nvPr/>
+        </p:nvSpPr>
+        <p:spPr>
+          <a:xfrm>
+            <a:off x="2514600" y="3035808"/>
+            <a:ext cx="3383280" cy="402336"/>
+          </a:xfrm>
+          <a:prstGeom prst="rect">
+            <a:avLst/>
+          </a:prstGeom>
+          <a:noFill/>
+          <a:ln/>
+        </p:spPr>
+        <p:txBody>
+          <a:bodyPr wrap="square" lIns="0" tIns="0" rIns="0" bIns="0" rtlCol="0" anchor="ctr"/>
+          <a:lstStyle/>
+          <a:p>
+            <a:pPr indent="0" marL="0">
+              <a:buNone/>
+            </a:pPr>
+            <a:r>
+              <a:rPr lang="en-US" sz="1150" dirty="0">
+                <a:solidFill>
+                  <a:srgbClr val="52606D"/>
+                </a:solidFill>
+                <a:latin typeface="Calibri" pitchFamily="34" charset="0"/>
+                <a:ea typeface="Calibri" pitchFamily="34" charset="-122"/>
+                <a:cs typeface="Calibri" pitchFamily="34" charset="-120"/>
+              </a:rPr>
+              <a:t>estoque, ou o setor informado</a:t>
+            </a:r>
+            <a:endParaRPr lang="en-US" sz="1150" dirty="0"/>
+          </a:p>
+        </p:txBody>
+      </p:sp>
+      <p:sp>
+        <p:nvSpPr>
+          <p:cNvPr id="13" name="Text 11"/>
+          <p:cNvSpPr txBox="1"/>
+          <p:nvPr/>
+        </p:nvSpPr>
+        <p:spPr>
+          <a:xfrm>
+            <a:off x="859536" y="3511296"/>
+            <a:ext cx="1600200" cy="365760"/>
+          </a:xfrm>
+          <a:prstGeom prst="rect">
+            <a:avLst/>
+          </a:prstGeom>
+          <a:noFill/>
+          <a:ln/>
+        </p:spPr>
+        <p:txBody>
+          <a:bodyPr wrap="square" lIns="0" tIns="0" rIns="0" bIns="0" rtlCol="0" anchor="ctr"/>
+          <a:lstStyle/>
+          <a:p>
+            <a:pPr indent="0" marL="0">
+              <a:buNone/>
+            </a:pPr>
+            <a:r>
+              <a:rPr lang="en-US" sz="1200" b="1" dirty="0">
+                <a:solidFill>
+                  <a:srgbClr val="1F2933"/>
+                </a:solidFill>
+                <a:latin typeface="Calibri" pitchFamily="34" charset="0"/>
+                <a:ea typeface="Calibri" pitchFamily="34" charset="-122"/>
+                <a:cs typeface="Calibri" pitchFamily="34" charset="-120"/>
+              </a:rPr>
+              <a:t>Imobilizar</a:t>
+            </a:r>
+            <a:endParaRPr lang="en-US" sz="1200" dirty="0"/>
+          </a:p>
+        </p:txBody>
+      </p:sp>
+      <p:sp>
+        <p:nvSpPr>
+          <p:cNvPr id="14" name="Text 12"/>
+          <p:cNvSpPr txBox="1"/>
+          <p:nvPr/>
+        </p:nvSpPr>
+        <p:spPr>
+          <a:xfrm>
+            <a:off x="2514600" y="3511296"/>
+            <a:ext cx="3383280" cy="402336"/>
+          </a:xfrm>
+          <a:prstGeom prst="rect">
+            <a:avLst/>
+          </a:prstGeom>
+          <a:noFill/>
+          <a:ln/>
+        </p:spPr>
+        <p:txBody>
+          <a:bodyPr wrap="square" lIns="0" tIns="0" rIns="0" bIns="0" rtlCol="0" anchor="ctr"/>
+          <a:lstStyle/>
+          <a:p>
+            <a:pPr indent="0" marL="0">
+              <a:buNone/>
+            </a:pPr>
+            <a:r>
+              <a:rPr lang="en-US" sz="1150" dirty="0">
+                <a:solidFill>
+                  <a:srgbClr val="52606D"/>
+                </a:solidFill>
+                <a:latin typeface="Calibri" pitchFamily="34" charset="0"/>
+                <a:ea typeface="Calibri" pitchFamily="34" charset="-122"/>
+                <a:cs typeface="Calibri" pitchFamily="34" charset="-120"/>
+              </a:rPr>
+              <a:t>decorre de a classe ser Ativo</a:t>
+            </a:r>
+            <a:endParaRPr lang="en-US" sz="1150" dirty="0"/>
+          </a:p>
+        </p:txBody>
+      </p:sp>
+      <p:sp>
+        <p:nvSpPr>
+          <p:cNvPr id="15" name="Text 13"/>
+          <p:cNvSpPr txBox="1"/>
+          <p:nvPr/>
+        </p:nvSpPr>
+        <p:spPr>
+          <a:xfrm>
+            <a:off x="859536" y="3986784"/>
+            <a:ext cx="1600200" cy="365760"/>
+          </a:xfrm>
+          <a:prstGeom prst="rect">
+            <a:avLst/>
+          </a:prstGeom>
+          <a:noFill/>
+          <a:ln/>
+        </p:spPr>
+        <p:txBody>
+          <a:bodyPr wrap="square" lIns="0" tIns="0" rIns="0" bIns="0" rtlCol="0" anchor="ctr"/>
+          <a:lstStyle/>
+          <a:p>
+            <a:pPr indent="0" marL="0">
+              <a:buNone/>
+            </a:pPr>
+            <a:r>
+              <a:rPr lang="en-US" sz="1200" b="1" dirty="0">
+                <a:solidFill>
+                  <a:srgbClr val="1F2933"/>
+                </a:solidFill>
+                <a:latin typeface="Calibri" pitchFamily="34" charset="0"/>
+                <a:ea typeface="Calibri" pitchFamily="34" charset="-122"/>
+                <a:cs typeface="Calibri" pitchFamily="34" charset="-120"/>
+              </a:rPr>
+              <a:t>Conta contábil</a:t>
+            </a:r>
+            <a:endParaRPr lang="en-US" sz="1200" dirty="0"/>
+          </a:p>
+        </p:txBody>
+      </p:sp>
+      <p:sp>
+        <p:nvSpPr>
+          <p:cNvPr id="16" name="Text 14"/>
+          <p:cNvSpPr txBox="1"/>
+          <p:nvPr/>
+        </p:nvSpPr>
+        <p:spPr>
+          <a:xfrm>
+            <a:off x="2514600" y="3986784"/>
+            <a:ext cx="3383280" cy="402336"/>
+          </a:xfrm>
+          <a:prstGeom prst="rect">
+            <a:avLst/>
+          </a:prstGeom>
+          <a:noFill/>
+          <a:ln/>
+        </p:spPr>
+        <p:txBody>
+          <a:bodyPr wrap="square" lIns="0" tIns="0" rIns="0" bIns="0" rtlCol="0" anchor="ctr"/>
+          <a:lstStyle/>
+          <a:p>
+            <a:pPr indent="0" marL="0">
+              <a:buNone/>
+            </a:pPr>
+            <a:r>
+              <a:rPr lang="en-US" sz="1150" dirty="0">
+                <a:solidFill>
+                  <a:srgbClr val="52606D"/>
+                </a:solidFill>
+                <a:latin typeface="Calibri" pitchFamily="34" charset="0"/>
+                <a:ea typeface="Calibri" pitchFamily="34" charset="-122"/>
+                <a:cs typeface="Calibri" pitchFamily="34" charset="-120"/>
+              </a:rPr>
+              <a:t>sai da taxonomia</a:t>
+            </a:r>
+            <a:endParaRPr lang="en-US" sz="1150" dirty="0"/>
+          </a:p>
+        </p:txBody>
+      </p:sp>
+      <p:sp>
+        <p:nvSpPr>
+          <p:cNvPr id="17" name="Text 15"/>
+          <p:cNvSpPr txBox="1"/>
+          <p:nvPr/>
+        </p:nvSpPr>
+        <p:spPr>
+          <a:xfrm>
+            <a:off x="859536" y="4462272"/>
+            <a:ext cx="1600200" cy="365760"/>
+          </a:xfrm>
+          <a:prstGeom prst="rect">
+            <a:avLst/>
+          </a:prstGeom>
+          <a:noFill/>
+          <a:ln/>
+        </p:spPr>
+        <p:txBody>
+          <a:bodyPr wrap="square" lIns="0" tIns="0" rIns="0" bIns="0" rtlCol="0" anchor="ctr"/>
+          <a:lstStyle/>
+          <a:p>
+            <a:pPr indent="0" marL="0">
+              <a:buNone/>
+            </a:pPr>
+            <a:r>
+              <a:rPr lang="en-US" sz="1200" b="1" dirty="0">
+                <a:solidFill>
+                  <a:srgbClr val="1F2933"/>
+                </a:solidFill>
+                <a:latin typeface="Calibri" pitchFamily="34" charset="0"/>
+                <a:ea typeface="Calibri" pitchFamily="34" charset="-122"/>
+                <a:cs typeface="Calibri" pitchFamily="34" charset="-120"/>
+              </a:rPr>
+              <a:t>NCM da nota</a:t>
+            </a:r>
+            <a:endParaRPr lang="en-US" sz="1200" dirty="0"/>
+          </a:p>
+        </p:txBody>
+      </p:sp>
+      <p:sp>
+        <p:nvSpPr>
+          <p:cNvPr id="18" name="Text 16"/>
+          <p:cNvSpPr txBox="1"/>
+          <p:nvPr/>
+        </p:nvSpPr>
+        <p:spPr>
+          <a:xfrm>
+            <a:off x="2514600" y="4462272"/>
+            <a:ext cx="3383280" cy="402336"/>
+          </a:xfrm>
+          <a:prstGeom prst="rect">
+            <a:avLst/>
+          </a:prstGeom>
+          <a:noFill/>
+          <a:ln/>
+        </p:spPr>
+        <p:txBody>
+          <a:bodyPr wrap="square" lIns="0" tIns="0" rIns="0" bIns="0" rtlCol="0" anchor="ctr"/>
+          <a:lstStyle/>
+          <a:p>
+            <a:pPr indent="0" marL="0">
+              <a:buNone/>
+            </a:pPr>
+            <a:r>
+              <a:rPr lang="en-US" sz="1150" dirty="0">
+                <a:solidFill>
+                  <a:srgbClr val="52606D"/>
+                </a:solidFill>
+                <a:latin typeface="Calibri" pitchFamily="34" charset="0"/>
+                <a:ea typeface="Calibri" pitchFamily="34" charset="-122"/>
+                <a:cs typeface="Calibri" pitchFamily="34" charset="-120"/>
+              </a:rPr>
+              <a:t>conferido, nunca recalculado</a:t>
+            </a:r>
+            <a:endParaRPr lang="en-US" sz="1150" dirty="0"/>
+          </a:p>
+        </p:txBody>
+      </p:sp>
+      <p:sp>
+        <p:nvSpPr>
+          <p:cNvPr id="19" name="Shape 17"/>
+          <p:cNvSpPr/>
+          <p:nvPr/>
+        </p:nvSpPr>
+        <p:spPr>
+          <a:xfrm>
+            <a:off x="6446520" y="1783080"/>
+            <a:ext cx="5532120" cy="3291840"/>
+          </a:xfrm>
+          <a:prstGeom prst="roundRect">
+            <a:avLst>
+              <a:gd name="adj" fmla="val 1667"/>
             </a:avLst>
           </a:prstGeom>
           <a:solidFill>
@@ -4464,100 +5044,512 @@
       </p:sp>
       <p:sp>
         <p:nvSpPr>
-          <p:cNvPr id="8" name="Text 6"/>
-          <p:cNvSpPr txBox="1"/>
-          <p:nvPr/>
-        </p:nvSpPr>
-        <p:spPr>
-          <a:xfrm>
-            <a:off x="4663440" y="2020824"/>
-            <a:ext cx="2926080" cy="749808"/>
-          </a:xfrm>
-          <a:prstGeom prst="rect">
-            <a:avLst/>
-          </a:prstGeom>
-          <a:noFill/>
-          <a:ln/>
-        </p:spPr>
-        <p:txBody>
-          <a:bodyPr wrap="square" lIns="0" tIns="0" rIns="0" bIns="0" rtlCol="0" anchor="ctr"/>
-          <a:lstStyle/>
-          <a:p>
-            <a:pPr indent="0" marL="0">
-              <a:buNone/>
-            </a:pPr>
-            <a:r>
-              <a:rPr lang="en-US" sz="4800" b="1" dirty="0">
-                <a:solidFill>
-                  <a:srgbClr val="1F2933"/>
-                </a:solidFill>
-                <a:latin typeface="Cambria" pitchFamily="34" charset="0"/>
-                <a:ea typeface="Cambria" pitchFamily="34" charset="-122"/>
-                <a:cs typeface="Cambria" pitchFamily="34" charset="-120"/>
-              </a:rPr>
-              <a:t>26</a:t>
-            </a:r>
-            <a:endParaRPr lang="en-US" sz="4800" dirty="0"/>
-          </a:p>
-        </p:txBody>
-      </p:sp>
-      <p:sp>
-        <p:nvSpPr>
-          <p:cNvPr id="9" name="Text 7"/>
-          <p:cNvSpPr txBox="1"/>
-          <p:nvPr/>
-        </p:nvSpPr>
-        <p:spPr>
-          <a:xfrm>
-            <a:off x="4663440" y="2825496"/>
-            <a:ext cx="2926080" cy="292608"/>
-          </a:xfrm>
-          <a:prstGeom prst="rect">
-            <a:avLst/>
-          </a:prstGeom>
-          <a:noFill/>
-          <a:ln/>
-        </p:spPr>
-        <p:txBody>
-          <a:bodyPr wrap="square" lIns="0" tIns="0" rIns="0" bIns="0" rtlCol="0" anchor="ctr"/>
-          <a:lstStyle/>
-          <a:p>
-            <a:pPr indent="0" marL="0">
-              <a:buNone/>
-            </a:pPr>
-            <a:r>
-              <a:rPr lang="en-US" sz="1300" dirty="0">
-                <a:solidFill>
-                  <a:srgbClr val="52606D"/>
-                </a:solidFill>
-                <a:latin typeface="Calibri" pitchFamily="34" charset="0"/>
-                <a:ea typeface="Calibri" pitchFamily="34" charset="-122"/>
-                <a:cs typeface="Calibri" pitchFamily="34" charset="-120"/>
-              </a:rPr>
-              <a:t>grupos</a:t>
-            </a:r>
-            <a:endParaRPr lang="en-US" sz="1300" dirty="0"/>
-          </a:p>
-        </p:txBody>
-      </p:sp>
-      <p:sp>
-        <p:nvSpPr>
-          <p:cNvPr id="10" name="Shape 8"/>
+          <p:cNvPr id="20" name="Shape 18"/>
           <p:cNvSpPr/>
           <p:nvPr/>
         </p:nvSpPr>
         <p:spPr>
           <a:xfrm>
-            <a:off x="8138160" y="1783080"/>
-            <a:ext cx="3520440" cy="1600200"/>
+            <a:off x="6739128" y="2029968"/>
+            <a:ext cx="2286000" cy="347472"/>
           </a:xfrm>
           <a:prstGeom prst="roundRect">
             <a:avLst>
-              <a:gd name="adj" fmla="val 3429"/>
+              <a:gd name="adj" fmla="val 13158"/>
             </a:avLst>
           </a:prstGeom>
           <a:solidFill>
-            <a:srgbClr val="F4F6F8"/>
+            <a:srgbClr val="C2660A"/>
+          </a:solidFill>
+          <a:ln/>
+        </p:spPr>
+      </p:sp>
+      <p:sp>
+        <p:nvSpPr>
+          <p:cNvPr id="21" name="Text 19"/>
+          <p:cNvSpPr txBox="1"/>
+          <p:nvPr/>
+        </p:nvSpPr>
+        <p:spPr>
+          <a:xfrm>
+            <a:off x="6739128" y="2103120"/>
+            <a:ext cx="2286000" cy="237744"/>
+          </a:xfrm>
+          <a:prstGeom prst="rect">
+            <a:avLst/>
+          </a:prstGeom>
+          <a:noFill/>
+          <a:ln/>
+        </p:spPr>
+        <p:txBody>
+          <a:bodyPr wrap="square" lIns="0" tIns="0" rIns="0" bIns="0" rtlCol="0" anchor="ctr"/>
+          <a:lstStyle/>
+          <a:p>
+            <a:pPr algn="ctr" indent="0" marL="0">
+              <a:buNone/>
+            </a:pPr>
+            <a:r>
+              <a:rPr lang="en-US" sz="1200" b="1" dirty="0">
+                <a:solidFill>
+                  <a:srgbClr val="FFFFFF"/>
+                </a:solidFill>
+                <a:latin typeface="Calibri" pitchFamily="34" charset="0"/>
+                <a:ea typeface="Calibri" pitchFamily="34" charset="-122"/>
+                <a:cs typeface="Calibri" pitchFamily="34" charset="-120"/>
+              </a:rPr>
+              <a:t>MODELO</a:t>
+            </a:r>
+            <a:endParaRPr lang="en-US" sz="1200" dirty="0"/>
+          </a:p>
+        </p:txBody>
+      </p:sp>
+      <p:sp>
+        <p:nvSpPr>
+          <p:cNvPr id="22" name="Text 20"/>
+          <p:cNvSpPr txBox="1"/>
+          <p:nvPr/>
+        </p:nvSpPr>
+        <p:spPr>
+          <a:xfrm>
+            <a:off x="9144000" y="2103120"/>
+            <a:ext cx="2651760" cy="237744"/>
+          </a:xfrm>
+          <a:prstGeom prst="rect">
+            <a:avLst/>
+          </a:prstGeom>
+          <a:noFill/>
+          <a:ln/>
+        </p:spPr>
+        <p:txBody>
+          <a:bodyPr wrap="square" lIns="0" tIns="0" rIns="0" bIns="0" rtlCol="0" anchor="ctr"/>
+          <a:lstStyle/>
+          <a:p>
+            <a:pPr indent="0" marL="0">
+              <a:buNone/>
+            </a:pPr>
+            <a:r>
+              <a:rPr lang="en-US" sz="1100" i="1" dirty="0">
+                <a:solidFill>
+                  <a:srgbClr val="52606D"/>
+                </a:solidFill>
+                <a:latin typeface="Calibri" pitchFamily="34" charset="0"/>
+                <a:ea typeface="Calibri" pitchFamily="34" charset="-122"/>
+                <a:cs typeface="Calibri" pitchFamily="34" charset="-120"/>
+              </a:rPr>
+              <a:t>o que exige interpretação</a:t>
+            </a:r>
+            <a:endParaRPr lang="en-US" sz="1100" dirty="0"/>
+          </a:p>
+        </p:txBody>
+      </p:sp>
+      <p:sp>
+        <p:nvSpPr>
+          <p:cNvPr id="23" name="Text 21"/>
+          <p:cNvSpPr txBox="1"/>
+          <p:nvPr/>
+        </p:nvSpPr>
+        <p:spPr>
+          <a:xfrm>
+            <a:off x="6757416" y="2560320"/>
+            <a:ext cx="1600200" cy="365760"/>
+          </a:xfrm>
+          <a:prstGeom prst="rect">
+            <a:avLst/>
+          </a:prstGeom>
+          <a:noFill/>
+          <a:ln/>
+        </p:spPr>
+        <p:txBody>
+          <a:bodyPr wrap="square" lIns="0" tIns="0" rIns="0" bIns="0" rtlCol="0" anchor="ctr"/>
+          <a:lstStyle/>
+          <a:p>
+            <a:pPr indent="0" marL="0">
+              <a:buNone/>
+            </a:pPr>
+            <a:r>
+              <a:rPr lang="en-US" sz="1200" b="1" dirty="0">
+                <a:solidFill>
+                  <a:srgbClr val="1F2933"/>
+                </a:solidFill>
+                <a:latin typeface="Calibri" pitchFamily="34" charset="0"/>
+                <a:ea typeface="Calibri" pitchFamily="34" charset="-122"/>
+                <a:cs typeface="Calibri" pitchFamily="34" charset="-120"/>
+              </a:rPr>
+              <a:t>Tipo</a:t>
+            </a:r>
+            <a:endParaRPr lang="en-US" sz="1200" dirty="0"/>
+          </a:p>
+        </p:txBody>
+      </p:sp>
+      <p:sp>
+        <p:nvSpPr>
+          <p:cNvPr id="24" name="Text 22"/>
+          <p:cNvSpPr txBox="1"/>
+          <p:nvPr/>
+        </p:nvSpPr>
+        <p:spPr>
+          <a:xfrm>
+            <a:off x="8412480" y="2560320"/>
+            <a:ext cx="3383280" cy="402336"/>
+          </a:xfrm>
+          <a:prstGeom prst="rect">
+            <a:avLst/>
+          </a:prstGeom>
+          <a:noFill/>
+          <a:ln/>
+        </p:spPr>
+        <p:txBody>
+          <a:bodyPr wrap="square" lIns="0" tIns="0" rIns="0" bIns="0" rtlCol="0" anchor="ctr"/>
+          <a:lstStyle/>
+          <a:p>
+            <a:pPr indent="0" marL="0">
+              <a:buNone/>
+            </a:pPr>
+            <a:r>
+              <a:rPr lang="en-US" sz="1150" dirty="0">
+                <a:solidFill>
+                  <a:srgbClr val="52606D"/>
+                </a:solidFill>
+                <a:latin typeface="Calibri" pitchFamily="34" charset="0"/>
+                <a:ea typeface="Calibri" pitchFamily="34" charset="-122"/>
+                <a:cs typeface="Calibri" pitchFamily="34" charset="-120"/>
+              </a:rPr>
+              <a:t>a que família o item pertence</a:t>
+            </a:r>
+            <a:endParaRPr lang="en-US" sz="1150" dirty="0"/>
+          </a:p>
+        </p:txBody>
+      </p:sp>
+      <p:sp>
+        <p:nvSpPr>
+          <p:cNvPr id="25" name="Text 23"/>
+          <p:cNvSpPr txBox="1"/>
+          <p:nvPr/>
+        </p:nvSpPr>
+        <p:spPr>
+          <a:xfrm>
+            <a:off x="6757416" y="3035808"/>
+            <a:ext cx="1600200" cy="365760"/>
+          </a:xfrm>
+          <a:prstGeom prst="rect">
+            <a:avLst/>
+          </a:prstGeom>
+          <a:noFill/>
+          <a:ln/>
+        </p:spPr>
+        <p:txBody>
+          <a:bodyPr wrap="square" lIns="0" tIns="0" rIns="0" bIns="0" rtlCol="0" anchor="ctr"/>
+          <a:lstStyle/>
+          <a:p>
+            <a:pPr indent="0" marL="0">
+              <a:buNone/>
+            </a:pPr>
+            <a:r>
+              <a:rPr lang="en-US" sz="1200" b="1" dirty="0">
+                <a:solidFill>
+                  <a:srgbClr val="1F2933"/>
+                </a:solidFill>
+                <a:latin typeface="Calibri" pitchFamily="34" charset="0"/>
+                <a:ea typeface="Calibri" pitchFamily="34" charset="-122"/>
+                <a:cs typeface="Calibri" pitchFamily="34" charset="-120"/>
+              </a:rPr>
+              <a:t>Grupo</a:t>
+            </a:r>
+            <a:endParaRPr lang="en-US" sz="1200" dirty="0"/>
+          </a:p>
+        </p:txBody>
+      </p:sp>
+      <p:sp>
+        <p:nvSpPr>
+          <p:cNvPr id="26" name="Text 24"/>
+          <p:cNvSpPr txBox="1"/>
+          <p:nvPr/>
+        </p:nvSpPr>
+        <p:spPr>
+          <a:xfrm>
+            <a:off x="8412480" y="3035808"/>
+            <a:ext cx="3383280" cy="402336"/>
+          </a:xfrm>
+          <a:prstGeom prst="rect">
+            <a:avLst/>
+          </a:prstGeom>
+          <a:noFill/>
+          <a:ln/>
+        </p:spPr>
+        <p:txBody>
+          <a:bodyPr wrap="square" lIns="0" tIns="0" rIns="0" bIns="0" rtlCol="0" anchor="ctr"/>
+          <a:lstStyle/>
+          <a:p>
+            <a:pPr indent="0" marL="0">
+              <a:buNone/>
+            </a:pPr>
+            <a:r>
+              <a:rPr lang="en-US" sz="1150" dirty="0">
+                <a:solidFill>
+                  <a:srgbClr val="52606D"/>
+                </a:solidFill>
+                <a:latin typeface="Calibri" pitchFamily="34" charset="0"/>
+                <a:ea typeface="Calibri" pitchFamily="34" charset="-122"/>
+                <a:cs typeface="Calibri" pitchFamily="34" charset="-120"/>
+              </a:rPr>
+              <a:t>dentro da família</a:t>
+            </a:r>
+            <a:endParaRPr lang="en-US" sz="1150" dirty="0"/>
+          </a:p>
+        </p:txBody>
+      </p:sp>
+      <p:sp>
+        <p:nvSpPr>
+          <p:cNvPr id="27" name="Text 25"/>
+          <p:cNvSpPr txBox="1"/>
+          <p:nvPr/>
+        </p:nvSpPr>
+        <p:spPr>
+          <a:xfrm>
+            <a:off x="6757416" y="3511296"/>
+            <a:ext cx="1600200" cy="365760"/>
+          </a:xfrm>
+          <a:prstGeom prst="rect">
+            <a:avLst/>
+          </a:prstGeom>
+          <a:noFill/>
+          <a:ln/>
+        </p:spPr>
+        <p:txBody>
+          <a:bodyPr wrap="square" lIns="0" tIns="0" rIns="0" bIns="0" rtlCol="0" anchor="ctr"/>
+          <a:lstStyle/>
+          <a:p>
+            <a:pPr indent="0" marL="0">
+              <a:buNone/>
+            </a:pPr>
+            <a:r>
+              <a:rPr lang="en-US" sz="1200" b="1" dirty="0">
+                <a:solidFill>
+                  <a:srgbClr val="1F2933"/>
+                </a:solidFill>
+                <a:latin typeface="Calibri" pitchFamily="34" charset="0"/>
+                <a:ea typeface="Calibri" pitchFamily="34" charset="-122"/>
+                <a:cs typeface="Calibri" pitchFamily="34" charset="-120"/>
+              </a:rPr>
+              <a:t>Subgrupo</a:t>
+            </a:r>
+            <a:endParaRPr lang="en-US" sz="1200" dirty="0"/>
+          </a:p>
+        </p:txBody>
+      </p:sp>
+      <p:sp>
+        <p:nvSpPr>
+          <p:cNvPr id="28" name="Text 26"/>
+          <p:cNvSpPr txBox="1"/>
+          <p:nvPr/>
+        </p:nvSpPr>
+        <p:spPr>
+          <a:xfrm>
+            <a:off x="8412480" y="3511296"/>
+            <a:ext cx="3383280" cy="402336"/>
+          </a:xfrm>
+          <a:prstGeom prst="rect">
+            <a:avLst/>
+          </a:prstGeom>
+          <a:noFill/>
+          <a:ln/>
+        </p:spPr>
+        <p:txBody>
+          <a:bodyPr wrap="square" lIns="0" tIns="0" rIns="0" bIns="0" rtlCol="0" anchor="ctr"/>
+          <a:lstStyle/>
+          <a:p>
+            <a:pPr indent="0" marL="0">
+              <a:buNone/>
+            </a:pPr>
+            <a:r>
+              <a:rPr lang="en-US" sz="1150" dirty="0">
+                <a:solidFill>
+                  <a:srgbClr val="52606D"/>
+                </a:solidFill>
+                <a:latin typeface="Calibri" pitchFamily="34" charset="0"/>
+                <a:ea typeface="Calibri" pitchFamily="34" charset="-122"/>
+                <a:cs typeface="Calibri" pitchFamily="34" charset="-120"/>
+              </a:rPr>
+              <a:t>o nível que define a conta</a:t>
+            </a:r>
+            <a:endParaRPr lang="en-US" sz="1150" dirty="0"/>
+          </a:p>
+        </p:txBody>
+      </p:sp>
+      <p:sp>
+        <p:nvSpPr>
+          <p:cNvPr id="29" name="Text 27"/>
+          <p:cNvSpPr txBox="1"/>
+          <p:nvPr/>
+        </p:nvSpPr>
+        <p:spPr>
+          <a:xfrm>
+            <a:off x="6757416" y="3986784"/>
+            <a:ext cx="1600200" cy="365760"/>
+          </a:xfrm>
+          <a:prstGeom prst="rect">
+            <a:avLst/>
+          </a:prstGeom>
+          <a:noFill/>
+          <a:ln/>
+        </p:spPr>
+        <p:txBody>
+          <a:bodyPr wrap="square" lIns="0" tIns="0" rIns="0" bIns="0" rtlCol="0" anchor="ctr"/>
+          <a:lstStyle/>
+          <a:p>
+            <a:pPr indent="0" marL="0">
+              <a:buNone/>
+            </a:pPr>
+            <a:r>
+              <a:rPr lang="en-US" sz="1200" b="1" dirty="0">
+                <a:solidFill>
+                  <a:srgbClr val="1F2933"/>
+                </a:solidFill>
+                <a:latin typeface="Calibri" pitchFamily="34" charset="0"/>
+                <a:ea typeface="Calibri" pitchFamily="34" charset="-122"/>
+                <a:cs typeface="Calibri" pitchFamily="34" charset="-120"/>
+              </a:rPr>
+              <a:t>NCM</a:t>
+            </a:r>
+            <a:endParaRPr lang="en-US" sz="1200" dirty="0"/>
+          </a:p>
+        </p:txBody>
+      </p:sp>
+      <p:sp>
+        <p:nvSpPr>
+          <p:cNvPr id="30" name="Text 28"/>
+          <p:cNvSpPr txBox="1"/>
+          <p:nvPr/>
+        </p:nvSpPr>
+        <p:spPr>
+          <a:xfrm>
+            <a:off x="8412480" y="3986784"/>
+            <a:ext cx="3383280" cy="402336"/>
+          </a:xfrm>
+          <a:prstGeom prst="rect">
+            <a:avLst/>
+          </a:prstGeom>
+          <a:noFill/>
+          <a:ln/>
+        </p:spPr>
+        <p:txBody>
+          <a:bodyPr wrap="square" lIns="0" tIns="0" rIns="0" bIns="0" rtlCol="0" anchor="ctr"/>
+          <a:lstStyle/>
+          <a:p>
+            <a:pPr indent="0" marL="0">
+              <a:buNone/>
+            </a:pPr>
+            <a:r>
+              <a:rPr lang="en-US" sz="1150" dirty="0">
+                <a:solidFill>
+                  <a:srgbClr val="52606D"/>
+                </a:solidFill>
+                <a:latin typeface="Calibri" pitchFamily="34" charset="0"/>
+                <a:ea typeface="Calibri" pitchFamily="34" charset="-122"/>
+                <a:cs typeface="Calibri" pitchFamily="34" charset="-120"/>
+              </a:rPr>
+              <a:t>só quando você não informa</a:t>
+            </a:r>
+            <a:endParaRPr lang="en-US" sz="1150" dirty="0"/>
+          </a:p>
+        </p:txBody>
+      </p:sp>
+      <p:sp>
+        <p:nvSpPr>
+          <p:cNvPr id="31" name="Text 29"/>
+          <p:cNvSpPr txBox="1"/>
+          <p:nvPr/>
+        </p:nvSpPr>
+        <p:spPr>
+          <a:xfrm>
+            <a:off x="6757416" y="4462272"/>
+            <a:ext cx="1600200" cy="365760"/>
+          </a:xfrm>
+          <a:prstGeom prst="rect">
+            <a:avLst/>
+          </a:prstGeom>
+          <a:noFill/>
+          <a:ln/>
+        </p:spPr>
+        <p:txBody>
+          <a:bodyPr wrap="square" lIns="0" tIns="0" rIns="0" bIns="0" rtlCol="0" anchor="ctr"/>
+          <a:lstStyle/>
+          <a:p>
+            <a:pPr indent="0" marL="0">
+              <a:buNone/>
+            </a:pPr>
+            <a:r>
+              <a:rPr lang="en-US" sz="1200" b="1" dirty="0">
+                <a:solidFill>
+                  <a:srgbClr val="1F2933"/>
+                </a:solidFill>
+                <a:latin typeface="Calibri" pitchFamily="34" charset="0"/>
+                <a:ea typeface="Calibri" pitchFamily="34" charset="-122"/>
+                <a:cs typeface="Calibri" pitchFamily="34" charset="-120"/>
+              </a:rPr>
+              <a:t>Cód. serviço</a:t>
+            </a:r>
+            <a:endParaRPr lang="en-US" sz="1200" dirty="0"/>
+          </a:p>
+        </p:txBody>
+      </p:sp>
+      <p:sp>
+        <p:nvSpPr>
+          <p:cNvPr id="32" name="Text 30"/>
+          <p:cNvSpPr txBox="1"/>
+          <p:nvPr/>
+        </p:nvSpPr>
+        <p:spPr>
+          <a:xfrm>
+            <a:off x="8412480" y="4462272"/>
+            <a:ext cx="3383280" cy="402336"/>
+          </a:xfrm>
+          <a:prstGeom prst="rect">
+            <a:avLst/>
+          </a:prstGeom>
+          <a:noFill/>
+          <a:ln/>
+        </p:spPr>
+        <p:txBody>
+          <a:bodyPr wrap="square" lIns="0" tIns="0" rIns="0" bIns="0" rtlCol="0" anchor="ctr"/>
+          <a:lstStyle/>
+          <a:p>
+            <a:pPr indent="0" marL="0">
+              <a:buNone/>
+            </a:pPr>
+            <a:r>
+              <a:rPr lang="en-US" sz="1150" dirty="0">
+                <a:solidFill>
+                  <a:srgbClr val="52606D"/>
+                </a:solidFill>
+                <a:latin typeface="Calibri" pitchFamily="34" charset="0"/>
+                <a:ea typeface="Calibri" pitchFamily="34" charset="-122"/>
+                <a:cs typeface="Calibri" pitchFamily="34" charset="-120"/>
+              </a:rPr>
+              <a:t>subitem da LC 116</a:t>
+            </a:r>
+            <a:endParaRPr lang="en-US" sz="1150" dirty="0"/>
+          </a:p>
+        </p:txBody>
+      </p:sp>
+      <p:sp>
+        <p:nvSpPr>
+          <p:cNvPr id="33" name="Shape 31"/>
+          <p:cNvSpPr/>
+          <p:nvPr/>
+        </p:nvSpPr>
+        <p:spPr>
+          <a:xfrm>
+            <a:off x="548640" y="5257800"/>
+            <a:ext cx="11064240" cy="1005840"/>
+          </a:xfrm>
+          <a:prstGeom prst="roundRect">
+            <a:avLst>
+              <a:gd name="adj" fmla="val 5455"/>
+            </a:avLst>
+          </a:prstGeom>
+          <a:solidFill>
+            <a:srgbClr val="1F2933"/>
           </a:solidFill>
           <a:ln w="9525">
             <a:solidFill>
@@ -4569,442 +5561,49 @@
       </p:sp>
       <p:sp>
         <p:nvSpPr>
-          <p:cNvPr id="11" name="Text 9"/>
-          <p:cNvSpPr txBox="1"/>
-          <p:nvPr/>
-        </p:nvSpPr>
-        <p:spPr>
-          <a:xfrm>
-            <a:off x="8458200" y="2020824"/>
-            <a:ext cx="2926080" cy="749808"/>
-          </a:xfrm>
-          <a:prstGeom prst="rect">
-            <a:avLst/>
-          </a:prstGeom>
-          <a:noFill/>
-          <a:ln/>
-        </p:spPr>
-        <p:txBody>
-          <a:bodyPr wrap="square" lIns="0" tIns="0" rIns="0" bIns="0" rtlCol="0" anchor="ctr"/>
-          <a:lstStyle/>
-          <a:p>
-            <a:pPr indent="0" marL="0">
-              <a:buNone/>
-            </a:pPr>
-            <a:r>
-              <a:rPr lang="en-US" sz="4800" b="1" dirty="0">
-                <a:solidFill>
-                  <a:srgbClr val="1F2933"/>
+          <p:cNvPr id="34" name="Text 32"/>
+          <p:cNvSpPr txBox="1"/>
+          <p:nvPr/>
+        </p:nvSpPr>
+        <p:spPr>
+          <a:xfrm>
+            <a:off x="1005840" y="5440680"/>
+            <a:ext cx="10149840" cy="640080"/>
+          </a:xfrm>
+          <a:prstGeom prst="rect">
+            <a:avLst/>
+          </a:prstGeom>
+          <a:noFill/>
+          <a:ln/>
+        </p:spPr>
+        <p:txBody>
+          <a:bodyPr wrap="square" lIns="0" tIns="0" rIns="0" bIns="0" rtlCol="0" anchor="ctr"/>
+          <a:lstStyle/>
+          <a:p>
+            <a:pPr indent="0" marL="0">
+              <a:lnSpc>
+                <a:spcPts val="2000"/>
+              </a:lnSpc>
+              <a:buNone/>
+            </a:pPr>
+            <a:r>
+              <a:rPr lang="en-US" sz="1400" i="1" dirty="0">
+                <a:solidFill>
+                  <a:srgbClr val="FFFFFF"/>
                 </a:solidFill>
                 <a:latin typeface="Cambria" pitchFamily="34" charset="0"/>
                 <a:ea typeface="Cambria" pitchFamily="34" charset="-122"/>
                 <a:cs typeface="Cambria" pitchFamily="34" charset="-120"/>
               </a:rPr>
-              <a:t>85</a:t>
-            </a:r>
-            <a:endParaRPr lang="en-US" sz="4800" dirty="0"/>
-          </a:p>
-        </p:txBody>
-      </p:sp>
-      <p:sp>
-        <p:nvSpPr>
-          <p:cNvPr id="12" name="Text 10"/>
-          <p:cNvSpPr txBox="1"/>
-          <p:nvPr/>
-        </p:nvSpPr>
-        <p:spPr>
-          <a:xfrm>
-            <a:off x="8458200" y="2825496"/>
-            <a:ext cx="2926080" cy="292608"/>
-          </a:xfrm>
-          <a:prstGeom prst="rect">
-            <a:avLst/>
-          </a:prstGeom>
-          <a:noFill/>
-          <a:ln/>
-        </p:spPr>
-        <p:txBody>
-          <a:bodyPr wrap="square" lIns="0" tIns="0" rIns="0" bIns="0" rtlCol="0" anchor="ctr"/>
-          <a:lstStyle/>
-          <a:p>
-            <a:pPr indent="0" marL="0">
-              <a:buNone/>
-            </a:pPr>
-            <a:r>
-              <a:rPr lang="en-US" sz="1300" dirty="0">
-                <a:solidFill>
-                  <a:srgbClr val="52606D"/>
-                </a:solidFill>
-                <a:latin typeface="Calibri" pitchFamily="34" charset="0"/>
-                <a:ea typeface="Calibri" pitchFamily="34" charset="-122"/>
-                <a:cs typeface="Calibri" pitchFamily="34" charset="-120"/>
-              </a:rPr>
-              <a:t>subgrupos</a:t>
-            </a:r>
-            <a:endParaRPr lang="en-US" sz="1300" dirty="0"/>
-          </a:p>
-        </p:txBody>
-      </p:sp>
-      <p:sp>
-        <p:nvSpPr>
-          <p:cNvPr id="13" name="Shape 11"/>
-          <p:cNvSpPr/>
-          <p:nvPr/>
-        </p:nvSpPr>
-        <p:spPr>
-          <a:xfrm>
-            <a:off x="548640" y="3657600"/>
-            <a:ext cx="3520440" cy="1600200"/>
-          </a:xfrm>
-          <a:prstGeom prst="roundRect">
-            <a:avLst>
-              <a:gd name="adj" fmla="val 3429"/>
-            </a:avLst>
-          </a:prstGeom>
-          <a:solidFill>
-            <a:srgbClr val="F4F6F8"/>
-          </a:solidFill>
-          <a:ln w="9525">
-            <a:solidFill>
-              <a:srgbClr val="D9DEE3"/>
-            </a:solidFill>
-            <a:prstDash val="solid"/>
-          </a:ln>
-        </p:spPr>
-      </p:sp>
-      <p:sp>
-        <p:nvSpPr>
-          <p:cNvPr id="14" name="Text 12"/>
-          <p:cNvSpPr txBox="1"/>
-          <p:nvPr/>
-        </p:nvSpPr>
-        <p:spPr>
-          <a:xfrm>
-            <a:off x="868680" y="3895344"/>
-            <a:ext cx="2926080" cy="749808"/>
-          </a:xfrm>
-          <a:prstGeom prst="rect">
-            <a:avLst/>
-          </a:prstGeom>
-          <a:noFill/>
-          <a:ln/>
-        </p:spPr>
-        <p:txBody>
-          <a:bodyPr wrap="square" lIns="0" tIns="0" rIns="0" bIns="0" rtlCol="0" anchor="ctr"/>
-          <a:lstStyle/>
-          <a:p>
-            <a:pPr indent="0" marL="0">
-              <a:buNone/>
-            </a:pPr>
-            <a:r>
-              <a:rPr lang="en-US" sz="4800" b="1" dirty="0">
-                <a:solidFill>
-                  <a:srgbClr val="1F2933"/>
-                </a:solidFill>
-                <a:latin typeface="Cambria" pitchFamily="34" charset="0"/>
-                <a:ea typeface="Cambria" pitchFamily="34" charset="-122"/>
-                <a:cs typeface="Cambria" pitchFamily="34" charset="-120"/>
-              </a:rPr>
-              <a:t>162</a:t>
-            </a:r>
-            <a:endParaRPr lang="en-US" sz="4800" dirty="0"/>
-          </a:p>
-        </p:txBody>
-      </p:sp>
-      <p:sp>
-        <p:nvSpPr>
-          <p:cNvPr id="15" name="Text 13"/>
-          <p:cNvSpPr txBox="1"/>
-          <p:nvPr/>
-        </p:nvSpPr>
-        <p:spPr>
-          <a:xfrm>
-            <a:off x="868680" y="4700016"/>
-            <a:ext cx="2926080" cy="292608"/>
-          </a:xfrm>
-          <a:prstGeom prst="rect">
-            <a:avLst/>
-          </a:prstGeom>
-          <a:noFill/>
-          <a:ln/>
-        </p:spPr>
-        <p:txBody>
-          <a:bodyPr wrap="square" lIns="0" tIns="0" rIns="0" bIns="0" rtlCol="0" anchor="ctr"/>
-          <a:lstStyle/>
-          <a:p>
-            <a:pPr indent="0" marL="0">
-              <a:buNone/>
-            </a:pPr>
-            <a:r>
-              <a:rPr lang="en-US" sz="1300" dirty="0">
-                <a:solidFill>
-                  <a:srgbClr val="52606D"/>
-                </a:solidFill>
-                <a:latin typeface="Calibri" pitchFamily="34" charset="0"/>
-                <a:ea typeface="Calibri" pitchFamily="34" charset="-122"/>
-                <a:cs typeface="Calibri" pitchFamily="34" charset="-120"/>
-              </a:rPr>
-              <a:t>combinações</a:t>
-            </a:r>
-            <a:endParaRPr lang="en-US" sz="1300" dirty="0"/>
-          </a:p>
-        </p:txBody>
-      </p:sp>
-      <p:sp>
-        <p:nvSpPr>
-          <p:cNvPr id="16" name="Shape 14"/>
-          <p:cNvSpPr/>
-          <p:nvPr/>
-        </p:nvSpPr>
-        <p:spPr>
-          <a:xfrm>
-            <a:off x="4343400" y="3657600"/>
-            <a:ext cx="3520440" cy="1600200"/>
-          </a:xfrm>
-          <a:prstGeom prst="roundRect">
-            <a:avLst>
-              <a:gd name="adj" fmla="val 3429"/>
-            </a:avLst>
-          </a:prstGeom>
-          <a:solidFill>
-            <a:srgbClr val="F4F6F8"/>
-          </a:solidFill>
-          <a:ln w="9525">
-            <a:solidFill>
-              <a:srgbClr val="D9DEE3"/>
-            </a:solidFill>
-            <a:prstDash val="solid"/>
-          </a:ln>
-        </p:spPr>
-      </p:sp>
-      <p:sp>
-        <p:nvSpPr>
-          <p:cNvPr id="17" name="Text 15"/>
-          <p:cNvSpPr txBox="1"/>
-          <p:nvPr/>
-        </p:nvSpPr>
-        <p:spPr>
-          <a:xfrm>
-            <a:off x="4663440" y="3895344"/>
-            <a:ext cx="2926080" cy="749808"/>
-          </a:xfrm>
-          <a:prstGeom prst="rect">
-            <a:avLst/>
-          </a:prstGeom>
-          <a:noFill/>
-          <a:ln/>
-        </p:spPr>
-        <p:txBody>
-          <a:bodyPr wrap="square" lIns="0" tIns="0" rIns="0" bIns="0" rtlCol="0" anchor="ctr"/>
-          <a:lstStyle/>
-          <a:p>
-            <a:pPr indent="0" marL="0">
-              <a:buNone/>
-            </a:pPr>
-            <a:r>
-              <a:rPr lang="en-US" sz="4800" b="1" dirty="0">
-                <a:solidFill>
-                  <a:srgbClr val="1F2933"/>
-                </a:solidFill>
-                <a:latin typeface="Cambria" pitchFamily="34" charset="0"/>
-                <a:ea typeface="Cambria" pitchFamily="34" charset="-122"/>
-                <a:cs typeface="Cambria" pitchFamily="34" charset="-120"/>
-              </a:rPr>
-              <a:t>446</a:t>
-            </a:r>
-            <a:endParaRPr lang="en-US" sz="4800" dirty="0"/>
-          </a:p>
-        </p:txBody>
-      </p:sp>
-      <p:sp>
-        <p:nvSpPr>
-          <p:cNvPr id="18" name="Text 16"/>
-          <p:cNvSpPr txBox="1"/>
-          <p:nvPr/>
-        </p:nvSpPr>
-        <p:spPr>
-          <a:xfrm>
-            <a:off x="4663440" y="4700016"/>
-            <a:ext cx="2926080" cy="292608"/>
-          </a:xfrm>
-          <a:prstGeom prst="rect">
-            <a:avLst/>
-          </a:prstGeom>
-          <a:noFill/>
-          <a:ln/>
-        </p:spPr>
-        <p:txBody>
-          <a:bodyPr wrap="square" lIns="0" tIns="0" rIns="0" bIns="0" rtlCol="0" anchor="ctr"/>
-          <a:lstStyle/>
-          <a:p>
-            <a:pPr indent="0" marL="0">
-              <a:buNone/>
-            </a:pPr>
-            <a:r>
-              <a:rPr lang="en-US" sz="1300" dirty="0">
-                <a:solidFill>
-                  <a:srgbClr val="52606D"/>
-                </a:solidFill>
-                <a:latin typeface="Calibri" pitchFamily="34" charset="0"/>
-                <a:ea typeface="Calibri" pitchFamily="34" charset="-122"/>
-                <a:cs typeface="Calibri" pitchFamily="34" charset="-120"/>
-              </a:rPr>
-              <a:t>contas no plano</a:t>
-            </a:r>
-            <a:endParaRPr lang="en-US" sz="1300" dirty="0"/>
-          </a:p>
-        </p:txBody>
-      </p:sp>
-      <p:sp>
-        <p:nvSpPr>
-          <p:cNvPr id="19" name="Shape 17"/>
-          <p:cNvSpPr/>
-          <p:nvPr/>
-        </p:nvSpPr>
-        <p:spPr>
-          <a:xfrm>
-            <a:off x="8138160" y="3657600"/>
-            <a:ext cx="3520440" cy="1600200"/>
-          </a:xfrm>
-          <a:prstGeom prst="roundRect">
-            <a:avLst>
-              <a:gd name="adj" fmla="val 3429"/>
-            </a:avLst>
-          </a:prstGeom>
-          <a:solidFill>
-            <a:srgbClr val="F4F6F8"/>
-          </a:solidFill>
-          <a:ln w="9525">
-            <a:solidFill>
-              <a:srgbClr val="D9DEE3"/>
-            </a:solidFill>
-            <a:prstDash val="solid"/>
-          </a:ln>
-        </p:spPr>
-      </p:sp>
-      <p:sp>
-        <p:nvSpPr>
-          <p:cNvPr id="20" name="Text 18"/>
-          <p:cNvSpPr txBox="1"/>
-          <p:nvPr/>
-        </p:nvSpPr>
-        <p:spPr>
-          <a:xfrm>
-            <a:off x="8458200" y="3895344"/>
-            <a:ext cx="2926080" cy="749808"/>
-          </a:xfrm>
-          <a:prstGeom prst="rect">
-            <a:avLst/>
-          </a:prstGeom>
-          <a:noFill/>
-          <a:ln/>
-        </p:spPr>
-        <p:txBody>
-          <a:bodyPr wrap="square" lIns="0" tIns="0" rIns="0" bIns="0" rtlCol="0" anchor="ctr"/>
-          <a:lstStyle/>
-          <a:p>
-            <a:pPr indent="0" marL="0">
-              <a:buNone/>
-            </a:pPr>
-            <a:r>
-              <a:rPr lang="en-US" sz="4800" b="1" dirty="0">
-                <a:solidFill>
-                  <a:srgbClr val="1B7A55"/>
-                </a:solidFill>
-                <a:latin typeface="Cambria" pitchFamily="34" charset="0"/>
-                <a:ea typeface="Cambria" pitchFamily="34" charset="-122"/>
-                <a:cs typeface="Cambria" pitchFamily="34" charset="-120"/>
-              </a:rPr>
-              <a:t>0</a:t>
-            </a:r>
-            <a:endParaRPr lang="en-US" sz="4800" dirty="0"/>
-          </a:p>
-        </p:txBody>
-      </p:sp>
-      <p:sp>
-        <p:nvSpPr>
-          <p:cNvPr id="21" name="Text 19"/>
-          <p:cNvSpPr txBox="1"/>
-          <p:nvPr/>
-        </p:nvSpPr>
-        <p:spPr>
-          <a:xfrm>
-            <a:off x="8458200" y="4700016"/>
-            <a:ext cx="2926080" cy="292608"/>
-          </a:xfrm>
-          <a:prstGeom prst="rect">
-            <a:avLst/>
-          </a:prstGeom>
-          <a:noFill/>
-          <a:ln/>
-        </p:spPr>
-        <p:txBody>
-          <a:bodyPr wrap="square" lIns="0" tIns="0" rIns="0" bIns="0" rtlCol="0" anchor="ctr"/>
-          <a:lstStyle/>
-          <a:p>
-            <a:pPr indent="0" marL="0">
-              <a:buNone/>
-            </a:pPr>
-            <a:r>
-              <a:rPr lang="en-US" sz="1300" dirty="0">
-                <a:solidFill>
-                  <a:srgbClr val="52606D"/>
-                </a:solidFill>
-                <a:latin typeface="Calibri" pitchFamily="34" charset="0"/>
-                <a:ea typeface="Calibri" pitchFamily="34" charset="-122"/>
-                <a:cs typeface="Calibri" pitchFamily="34" charset="-120"/>
-              </a:rPr>
-              <a:t>referências órfãs</a:t>
-            </a:r>
-            <a:endParaRPr lang="en-US" sz="1300" dirty="0"/>
-          </a:p>
-        </p:txBody>
-      </p:sp>
-      <p:sp>
-        <p:nvSpPr>
-          <p:cNvPr id="22" name="Text 20"/>
-          <p:cNvSpPr txBox="1"/>
-          <p:nvPr/>
-        </p:nvSpPr>
-        <p:spPr>
-          <a:xfrm>
-            <a:off x="548640" y="5669280"/>
-            <a:ext cx="11064240" cy="548640"/>
-          </a:xfrm>
-          <a:prstGeom prst="rect">
-            <a:avLst/>
-          </a:prstGeom>
-          <a:noFill/>
-          <a:ln/>
-        </p:spPr>
-        <p:txBody>
-          <a:bodyPr wrap="square" lIns="0" tIns="0" rIns="0" bIns="0" rtlCol="0" anchor="ctr"/>
-          <a:lstStyle/>
-          <a:p>
-            <a:pPr indent="0" marL="0">
-              <a:lnSpc>
-                <a:spcPts val="1700"/>
-              </a:lnSpc>
-              <a:buNone/>
-            </a:pPr>
-            <a:r>
-              <a:rPr lang="en-US" sz="1250" dirty="0">
-                <a:solidFill>
-                  <a:srgbClr val="52606D"/>
-                </a:solidFill>
-                <a:latin typeface="Calibri" pitchFamily="34" charset="0"/>
-                <a:ea typeface="Calibri" pitchFamily="34" charset="-122"/>
-                <a:cs typeface="Calibri" pitchFamily="34" charset="-120"/>
-              </a:rPr>
-              <a:t>A taxonomia de exemplo cobre imobilizado, uso e consumo e serviços. Matéria-prima, insumos e produto acabado variam demais entre empresas e entram pela mesma estrutura, quando cada uma adotar.</a:t>
-            </a:r>
-            <a:endParaRPr lang="en-US" sz="1250" dirty="0"/>
-          </a:p>
-        </p:txBody>
-      </p:sp>
-      <p:sp>
-        <p:nvSpPr>
-          <p:cNvPr id="23" name="Text 21"/>
+              <a:t>Dado o tipo de item, o grupo, o subgrupo e o setor, a conta é sempre a mesma, com ou sem IA. É isso que torna o cadastro auditável em vez de opinião.</a:t>
+            </a:r>
+            <a:endParaRPr lang="en-US" sz="1400" dirty="0"/>
+          </a:p>
+        </p:txBody>
+      </p:sp>
+      <p:sp>
+        <p:nvSpPr>
+          <p:cNvPr id="35" name="Text 33"/>
           <p:cNvSpPr txBox="1"/>
           <p:nvPr/>
         </p:nvSpPr>
@@ -5043,7 +5642,7 @@
       </p:sp>
       <p:sp>
         <p:nvSpPr>
-          <p:cNvPr id="24" name="Text 22"/>
+          <p:cNvPr id="36" name="Text 34"/>
           <p:cNvSpPr txBox="1"/>
           <p:nvPr/>
         </p:nvSpPr>
@@ -5091,6 +5690,866 @@
 <file path=ppt/slides/slide13.xml><?xml version="1.0" encoding="utf-8"?>
 <p:sld xmlns:a="http://schemas.openxmlformats.org/drawingml/2006/main" xmlns:r="http://schemas.openxmlformats.org/officeDocument/2006/relationships" xmlns:p="http://schemas.openxmlformats.org/presentationml/2006/main">
   <p:cSld name="Slide 13">
+    <p:bg>
+      <p:bgPr>
+        <a:solidFill>
+          <a:srgbClr val="FFFFFF"/>
+        </a:solidFill>
+      </p:bgPr>
+    </p:bg>
+    <p:spTree>
+      <p:nvGrpSpPr>
+        <p:cNvPr id="1" name=""/>
+        <p:cNvGrpSpPr/>
+        <p:nvPr/>
+      </p:nvGrpSpPr>
+      <p:grpSpPr>
+        <a:xfrm>
+          <a:off x="0" y="0"/>
+          <a:ext cx="0" cy="0"/>
+          <a:chOff x="0" y="0"/>
+          <a:chExt cx="0" cy="0"/>
+        </a:xfrm>
+      </p:grpSpPr>
+      <p:sp>
+        <p:nvSpPr>
+          <p:cNvPr id="2" name="Text 0"/>
+          <p:cNvSpPr txBox="1"/>
+          <p:nvPr/>
+        </p:nvSpPr>
+        <p:spPr>
+          <a:xfrm>
+            <a:off x="548640" y="384048"/>
+            <a:ext cx="11064240" cy="237744"/>
+          </a:xfrm>
+          <a:prstGeom prst="rect">
+            <a:avLst/>
+          </a:prstGeom>
+          <a:noFill/>
+          <a:ln/>
+        </p:spPr>
+        <p:txBody>
+          <a:bodyPr wrap="square" lIns="0" tIns="0" rIns="0" bIns="0" rtlCol="0" anchor="ctr"/>
+          <a:lstStyle/>
+          <a:p>
+            <a:pPr indent="0" marL="0">
+              <a:buNone/>
+            </a:pPr>
+            <a:r>
+              <a:rPr lang="en-US" sz="1200" b="1" spc="160" kern="0" dirty="0">
+                <a:solidFill>
+                  <a:srgbClr val="C2660A"/>
+                </a:solidFill>
+                <a:latin typeface="Calibri" pitchFamily="34" charset="0"/>
+                <a:ea typeface="Calibri" pitchFamily="34" charset="-122"/>
+                <a:cs typeface="Calibri" pitchFamily="34" charset="-120"/>
+              </a:rPr>
+              <a:t>O MODELO DE EXEMPLO</a:t>
+            </a:r>
+            <a:endParaRPr lang="en-US" sz="1200" dirty="0"/>
+          </a:p>
+        </p:txBody>
+      </p:sp>
+      <p:sp>
+        <p:nvSpPr>
+          <p:cNvPr id="3" name="Text 1"/>
+          <p:cNvSpPr txBox="1"/>
+          <p:nvPr/>
+        </p:nvSpPr>
+        <p:spPr>
+          <a:xfrm>
+            <a:off x="548640" y="658368"/>
+            <a:ext cx="11064240" cy="566928"/>
+          </a:xfrm>
+          <a:prstGeom prst="rect">
+            <a:avLst/>
+          </a:prstGeom>
+          <a:noFill/>
+          <a:ln/>
+        </p:spPr>
+        <p:txBody>
+          <a:bodyPr wrap="square" lIns="0" tIns="0" rIns="0" bIns="0" rtlCol="0" anchor="ctr"/>
+          <a:lstStyle/>
+          <a:p>
+            <a:pPr indent="0" marL="0">
+              <a:buNone/>
+            </a:pPr>
+            <a:r>
+              <a:rPr lang="en-US" sz="3000" b="1" dirty="0">
+                <a:solidFill>
+                  <a:srgbClr val="1F2933"/>
+                </a:solidFill>
+                <a:latin typeface="Cambria" pitchFamily="34" charset="0"/>
+                <a:ea typeface="Cambria" pitchFamily="34" charset="-122"/>
+                <a:cs typeface="Cambria" pitchFamily="34" charset="-120"/>
+              </a:rPr>
+              <a:t>A estrutura que acompanha o projeto</a:t>
+            </a:r>
+            <a:endParaRPr lang="en-US" sz="3000" dirty="0"/>
+          </a:p>
+        </p:txBody>
+      </p:sp>
+      <p:sp>
+        <p:nvSpPr>
+          <p:cNvPr id="4" name="Shape 2"/>
+          <p:cNvSpPr/>
+          <p:nvPr/>
+        </p:nvSpPr>
+        <p:spPr>
+          <a:xfrm>
+            <a:off x="548640" y="1783080"/>
+            <a:ext cx="3520440" cy="1600200"/>
+          </a:xfrm>
+          <a:prstGeom prst="roundRect">
+            <a:avLst>
+              <a:gd name="adj" fmla="val 3429"/>
+            </a:avLst>
+          </a:prstGeom>
+          <a:solidFill>
+            <a:srgbClr val="F4F6F8"/>
+          </a:solidFill>
+          <a:ln w="9525">
+            <a:solidFill>
+              <a:srgbClr val="D9DEE3"/>
+            </a:solidFill>
+            <a:prstDash val="solid"/>
+          </a:ln>
+        </p:spPr>
+      </p:sp>
+      <p:sp>
+        <p:nvSpPr>
+          <p:cNvPr id="5" name="Text 3"/>
+          <p:cNvSpPr txBox="1"/>
+          <p:nvPr/>
+        </p:nvSpPr>
+        <p:spPr>
+          <a:xfrm>
+            <a:off x="868680" y="2020824"/>
+            <a:ext cx="2926080" cy="749808"/>
+          </a:xfrm>
+          <a:prstGeom prst="rect">
+            <a:avLst/>
+          </a:prstGeom>
+          <a:noFill/>
+          <a:ln/>
+        </p:spPr>
+        <p:txBody>
+          <a:bodyPr wrap="square" lIns="0" tIns="0" rIns="0" bIns="0" rtlCol="0" anchor="ctr"/>
+          <a:lstStyle/>
+          <a:p>
+            <a:pPr indent="0" marL="0">
+              <a:buNone/>
+            </a:pPr>
+            <a:r>
+              <a:rPr lang="en-US" sz="4800" b="1" dirty="0">
+                <a:solidFill>
+                  <a:srgbClr val="1F2933"/>
+                </a:solidFill>
+                <a:latin typeface="Cambria" pitchFamily="34" charset="0"/>
+                <a:ea typeface="Cambria" pitchFamily="34" charset="-122"/>
+                <a:cs typeface="Cambria" pitchFamily="34" charset="-120"/>
+              </a:rPr>
+              <a:t>3</a:t>
+            </a:r>
+            <a:endParaRPr lang="en-US" sz="4800" dirty="0"/>
+          </a:p>
+        </p:txBody>
+      </p:sp>
+      <p:sp>
+        <p:nvSpPr>
+          <p:cNvPr id="6" name="Text 4"/>
+          <p:cNvSpPr txBox="1"/>
+          <p:nvPr/>
+        </p:nvSpPr>
+        <p:spPr>
+          <a:xfrm>
+            <a:off x="868680" y="2825496"/>
+            <a:ext cx="2926080" cy="292608"/>
+          </a:xfrm>
+          <a:prstGeom prst="rect">
+            <a:avLst/>
+          </a:prstGeom>
+          <a:noFill/>
+          <a:ln/>
+        </p:spPr>
+        <p:txBody>
+          <a:bodyPr wrap="square" lIns="0" tIns="0" rIns="0" bIns="0" rtlCol="0" anchor="ctr"/>
+          <a:lstStyle/>
+          <a:p>
+            <a:pPr indent="0" marL="0">
+              <a:buNone/>
+            </a:pPr>
+            <a:r>
+              <a:rPr lang="en-US" sz="1300" dirty="0">
+                <a:solidFill>
+                  <a:srgbClr val="52606D"/>
+                </a:solidFill>
+                <a:latin typeface="Calibri" pitchFamily="34" charset="0"/>
+                <a:ea typeface="Calibri" pitchFamily="34" charset="-122"/>
+                <a:cs typeface="Calibri" pitchFamily="34" charset="-120"/>
+              </a:rPr>
+              <a:t>tipos de item</a:t>
+            </a:r>
+            <a:endParaRPr lang="en-US" sz="1300" dirty="0"/>
+          </a:p>
+        </p:txBody>
+      </p:sp>
+      <p:sp>
+        <p:nvSpPr>
+          <p:cNvPr id="7" name="Shape 5"/>
+          <p:cNvSpPr/>
+          <p:nvPr/>
+        </p:nvSpPr>
+        <p:spPr>
+          <a:xfrm>
+            <a:off x="4343400" y="1783080"/>
+            <a:ext cx="3520440" cy="1600200"/>
+          </a:xfrm>
+          <a:prstGeom prst="roundRect">
+            <a:avLst>
+              <a:gd name="adj" fmla="val 3429"/>
+            </a:avLst>
+          </a:prstGeom>
+          <a:solidFill>
+            <a:srgbClr val="F4F6F8"/>
+          </a:solidFill>
+          <a:ln w="9525">
+            <a:solidFill>
+              <a:srgbClr val="D9DEE3"/>
+            </a:solidFill>
+            <a:prstDash val="solid"/>
+          </a:ln>
+        </p:spPr>
+      </p:sp>
+      <p:sp>
+        <p:nvSpPr>
+          <p:cNvPr id="8" name="Text 6"/>
+          <p:cNvSpPr txBox="1"/>
+          <p:nvPr/>
+        </p:nvSpPr>
+        <p:spPr>
+          <a:xfrm>
+            <a:off x="4663440" y="2020824"/>
+            <a:ext cx="2926080" cy="749808"/>
+          </a:xfrm>
+          <a:prstGeom prst="rect">
+            <a:avLst/>
+          </a:prstGeom>
+          <a:noFill/>
+          <a:ln/>
+        </p:spPr>
+        <p:txBody>
+          <a:bodyPr wrap="square" lIns="0" tIns="0" rIns="0" bIns="0" rtlCol="0" anchor="ctr"/>
+          <a:lstStyle/>
+          <a:p>
+            <a:pPr indent="0" marL="0">
+              <a:buNone/>
+            </a:pPr>
+            <a:r>
+              <a:rPr lang="en-US" sz="4800" b="1" dirty="0">
+                <a:solidFill>
+                  <a:srgbClr val="1F2933"/>
+                </a:solidFill>
+                <a:latin typeface="Cambria" pitchFamily="34" charset="0"/>
+                <a:ea typeface="Cambria" pitchFamily="34" charset="-122"/>
+                <a:cs typeface="Cambria" pitchFamily="34" charset="-120"/>
+              </a:rPr>
+              <a:t>26</a:t>
+            </a:r>
+            <a:endParaRPr lang="en-US" sz="4800" dirty="0"/>
+          </a:p>
+        </p:txBody>
+      </p:sp>
+      <p:sp>
+        <p:nvSpPr>
+          <p:cNvPr id="9" name="Text 7"/>
+          <p:cNvSpPr txBox="1"/>
+          <p:nvPr/>
+        </p:nvSpPr>
+        <p:spPr>
+          <a:xfrm>
+            <a:off x="4663440" y="2825496"/>
+            <a:ext cx="2926080" cy="292608"/>
+          </a:xfrm>
+          <a:prstGeom prst="rect">
+            <a:avLst/>
+          </a:prstGeom>
+          <a:noFill/>
+          <a:ln/>
+        </p:spPr>
+        <p:txBody>
+          <a:bodyPr wrap="square" lIns="0" tIns="0" rIns="0" bIns="0" rtlCol="0" anchor="ctr"/>
+          <a:lstStyle/>
+          <a:p>
+            <a:pPr indent="0" marL="0">
+              <a:buNone/>
+            </a:pPr>
+            <a:r>
+              <a:rPr lang="en-US" sz="1300" dirty="0">
+                <a:solidFill>
+                  <a:srgbClr val="52606D"/>
+                </a:solidFill>
+                <a:latin typeface="Calibri" pitchFamily="34" charset="0"/>
+                <a:ea typeface="Calibri" pitchFamily="34" charset="-122"/>
+                <a:cs typeface="Calibri" pitchFamily="34" charset="-120"/>
+              </a:rPr>
+              <a:t>grupos</a:t>
+            </a:r>
+            <a:endParaRPr lang="en-US" sz="1300" dirty="0"/>
+          </a:p>
+        </p:txBody>
+      </p:sp>
+      <p:sp>
+        <p:nvSpPr>
+          <p:cNvPr id="10" name="Shape 8"/>
+          <p:cNvSpPr/>
+          <p:nvPr/>
+        </p:nvSpPr>
+        <p:spPr>
+          <a:xfrm>
+            <a:off x="8138160" y="1783080"/>
+            <a:ext cx="3520440" cy="1600200"/>
+          </a:xfrm>
+          <a:prstGeom prst="roundRect">
+            <a:avLst>
+              <a:gd name="adj" fmla="val 3429"/>
+            </a:avLst>
+          </a:prstGeom>
+          <a:solidFill>
+            <a:srgbClr val="F4F6F8"/>
+          </a:solidFill>
+          <a:ln w="9525">
+            <a:solidFill>
+              <a:srgbClr val="D9DEE3"/>
+            </a:solidFill>
+            <a:prstDash val="solid"/>
+          </a:ln>
+        </p:spPr>
+      </p:sp>
+      <p:sp>
+        <p:nvSpPr>
+          <p:cNvPr id="11" name="Text 9"/>
+          <p:cNvSpPr txBox="1"/>
+          <p:nvPr/>
+        </p:nvSpPr>
+        <p:spPr>
+          <a:xfrm>
+            <a:off x="8458200" y="2020824"/>
+            <a:ext cx="2926080" cy="749808"/>
+          </a:xfrm>
+          <a:prstGeom prst="rect">
+            <a:avLst/>
+          </a:prstGeom>
+          <a:noFill/>
+          <a:ln/>
+        </p:spPr>
+        <p:txBody>
+          <a:bodyPr wrap="square" lIns="0" tIns="0" rIns="0" bIns="0" rtlCol="0" anchor="ctr"/>
+          <a:lstStyle/>
+          <a:p>
+            <a:pPr indent="0" marL="0">
+              <a:buNone/>
+            </a:pPr>
+            <a:r>
+              <a:rPr lang="en-US" sz="4800" b="1" dirty="0">
+                <a:solidFill>
+                  <a:srgbClr val="1F2933"/>
+                </a:solidFill>
+                <a:latin typeface="Cambria" pitchFamily="34" charset="0"/>
+                <a:ea typeface="Cambria" pitchFamily="34" charset="-122"/>
+                <a:cs typeface="Cambria" pitchFamily="34" charset="-120"/>
+              </a:rPr>
+              <a:t>85</a:t>
+            </a:r>
+            <a:endParaRPr lang="en-US" sz="4800" dirty="0"/>
+          </a:p>
+        </p:txBody>
+      </p:sp>
+      <p:sp>
+        <p:nvSpPr>
+          <p:cNvPr id="12" name="Text 10"/>
+          <p:cNvSpPr txBox="1"/>
+          <p:nvPr/>
+        </p:nvSpPr>
+        <p:spPr>
+          <a:xfrm>
+            <a:off x="8458200" y="2825496"/>
+            <a:ext cx="2926080" cy="292608"/>
+          </a:xfrm>
+          <a:prstGeom prst="rect">
+            <a:avLst/>
+          </a:prstGeom>
+          <a:noFill/>
+          <a:ln/>
+        </p:spPr>
+        <p:txBody>
+          <a:bodyPr wrap="square" lIns="0" tIns="0" rIns="0" bIns="0" rtlCol="0" anchor="ctr"/>
+          <a:lstStyle/>
+          <a:p>
+            <a:pPr indent="0" marL="0">
+              <a:buNone/>
+            </a:pPr>
+            <a:r>
+              <a:rPr lang="en-US" sz="1300" dirty="0">
+                <a:solidFill>
+                  <a:srgbClr val="52606D"/>
+                </a:solidFill>
+                <a:latin typeface="Calibri" pitchFamily="34" charset="0"/>
+                <a:ea typeface="Calibri" pitchFamily="34" charset="-122"/>
+                <a:cs typeface="Calibri" pitchFamily="34" charset="-120"/>
+              </a:rPr>
+              <a:t>subgrupos</a:t>
+            </a:r>
+            <a:endParaRPr lang="en-US" sz="1300" dirty="0"/>
+          </a:p>
+        </p:txBody>
+      </p:sp>
+      <p:sp>
+        <p:nvSpPr>
+          <p:cNvPr id="13" name="Shape 11"/>
+          <p:cNvSpPr/>
+          <p:nvPr/>
+        </p:nvSpPr>
+        <p:spPr>
+          <a:xfrm>
+            <a:off x="548640" y="3657600"/>
+            <a:ext cx="3520440" cy="1600200"/>
+          </a:xfrm>
+          <a:prstGeom prst="roundRect">
+            <a:avLst>
+              <a:gd name="adj" fmla="val 3429"/>
+            </a:avLst>
+          </a:prstGeom>
+          <a:solidFill>
+            <a:srgbClr val="F4F6F8"/>
+          </a:solidFill>
+          <a:ln w="9525">
+            <a:solidFill>
+              <a:srgbClr val="D9DEE3"/>
+            </a:solidFill>
+            <a:prstDash val="solid"/>
+          </a:ln>
+        </p:spPr>
+      </p:sp>
+      <p:sp>
+        <p:nvSpPr>
+          <p:cNvPr id="14" name="Text 12"/>
+          <p:cNvSpPr txBox="1"/>
+          <p:nvPr/>
+        </p:nvSpPr>
+        <p:spPr>
+          <a:xfrm>
+            <a:off x="868680" y="3895344"/>
+            <a:ext cx="2926080" cy="749808"/>
+          </a:xfrm>
+          <a:prstGeom prst="rect">
+            <a:avLst/>
+          </a:prstGeom>
+          <a:noFill/>
+          <a:ln/>
+        </p:spPr>
+        <p:txBody>
+          <a:bodyPr wrap="square" lIns="0" tIns="0" rIns="0" bIns="0" rtlCol="0" anchor="ctr"/>
+          <a:lstStyle/>
+          <a:p>
+            <a:pPr indent="0" marL="0">
+              <a:buNone/>
+            </a:pPr>
+            <a:r>
+              <a:rPr lang="en-US" sz="4800" b="1" dirty="0">
+                <a:solidFill>
+                  <a:srgbClr val="1F2933"/>
+                </a:solidFill>
+                <a:latin typeface="Cambria" pitchFamily="34" charset="0"/>
+                <a:ea typeface="Cambria" pitchFamily="34" charset="-122"/>
+                <a:cs typeface="Cambria" pitchFamily="34" charset="-120"/>
+              </a:rPr>
+              <a:t>162</a:t>
+            </a:r>
+            <a:endParaRPr lang="en-US" sz="4800" dirty="0"/>
+          </a:p>
+        </p:txBody>
+      </p:sp>
+      <p:sp>
+        <p:nvSpPr>
+          <p:cNvPr id="15" name="Text 13"/>
+          <p:cNvSpPr txBox="1"/>
+          <p:nvPr/>
+        </p:nvSpPr>
+        <p:spPr>
+          <a:xfrm>
+            <a:off x="868680" y="4700016"/>
+            <a:ext cx="2926080" cy="292608"/>
+          </a:xfrm>
+          <a:prstGeom prst="rect">
+            <a:avLst/>
+          </a:prstGeom>
+          <a:noFill/>
+          <a:ln/>
+        </p:spPr>
+        <p:txBody>
+          <a:bodyPr wrap="square" lIns="0" tIns="0" rIns="0" bIns="0" rtlCol="0" anchor="ctr"/>
+          <a:lstStyle/>
+          <a:p>
+            <a:pPr indent="0" marL="0">
+              <a:buNone/>
+            </a:pPr>
+            <a:r>
+              <a:rPr lang="en-US" sz="1300" dirty="0">
+                <a:solidFill>
+                  <a:srgbClr val="52606D"/>
+                </a:solidFill>
+                <a:latin typeface="Calibri" pitchFamily="34" charset="0"/>
+                <a:ea typeface="Calibri" pitchFamily="34" charset="-122"/>
+                <a:cs typeface="Calibri" pitchFamily="34" charset="-120"/>
+              </a:rPr>
+              <a:t>combinações</a:t>
+            </a:r>
+            <a:endParaRPr lang="en-US" sz="1300" dirty="0"/>
+          </a:p>
+        </p:txBody>
+      </p:sp>
+      <p:sp>
+        <p:nvSpPr>
+          <p:cNvPr id="16" name="Shape 14"/>
+          <p:cNvSpPr/>
+          <p:nvPr/>
+        </p:nvSpPr>
+        <p:spPr>
+          <a:xfrm>
+            <a:off x="4343400" y="3657600"/>
+            <a:ext cx="3520440" cy="1600200"/>
+          </a:xfrm>
+          <a:prstGeom prst="roundRect">
+            <a:avLst>
+              <a:gd name="adj" fmla="val 3429"/>
+            </a:avLst>
+          </a:prstGeom>
+          <a:solidFill>
+            <a:srgbClr val="F4F6F8"/>
+          </a:solidFill>
+          <a:ln w="9525">
+            <a:solidFill>
+              <a:srgbClr val="D9DEE3"/>
+            </a:solidFill>
+            <a:prstDash val="solid"/>
+          </a:ln>
+        </p:spPr>
+      </p:sp>
+      <p:sp>
+        <p:nvSpPr>
+          <p:cNvPr id="17" name="Text 15"/>
+          <p:cNvSpPr txBox="1"/>
+          <p:nvPr/>
+        </p:nvSpPr>
+        <p:spPr>
+          <a:xfrm>
+            <a:off x="4663440" y="3895344"/>
+            <a:ext cx="2926080" cy="749808"/>
+          </a:xfrm>
+          <a:prstGeom prst="rect">
+            <a:avLst/>
+          </a:prstGeom>
+          <a:noFill/>
+          <a:ln/>
+        </p:spPr>
+        <p:txBody>
+          <a:bodyPr wrap="square" lIns="0" tIns="0" rIns="0" bIns="0" rtlCol="0" anchor="ctr"/>
+          <a:lstStyle/>
+          <a:p>
+            <a:pPr indent="0" marL="0">
+              <a:buNone/>
+            </a:pPr>
+            <a:r>
+              <a:rPr lang="en-US" sz="4800" b="1" dirty="0">
+                <a:solidFill>
+                  <a:srgbClr val="1F2933"/>
+                </a:solidFill>
+                <a:latin typeface="Cambria" pitchFamily="34" charset="0"/>
+                <a:ea typeface="Cambria" pitchFamily="34" charset="-122"/>
+                <a:cs typeface="Cambria" pitchFamily="34" charset="-120"/>
+              </a:rPr>
+              <a:t>446</a:t>
+            </a:r>
+            <a:endParaRPr lang="en-US" sz="4800" dirty="0"/>
+          </a:p>
+        </p:txBody>
+      </p:sp>
+      <p:sp>
+        <p:nvSpPr>
+          <p:cNvPr id="18" name="Text 16"/>
+          <p:cNvSpPr txBox="1"/>
+          <p:nvPr/>
+        </p:nvSpPr>
+        <p:spPr>
+          <a:xfrm>
+            <a:off x="4663440" y="4700016"/>
+            <a:ext cx="2926080" cy="292608"/>
+          </a:xfrm>
+          <a:prstGeom prst="rect">
+            <a:avLst/>
+          </a:prstGeom>
+          <a:noFill/>
+          <a:ln/>
+        </p:spPr>
+        <p:txBody>
+          <a:bodyPr wrap="square" lIns="0" tIns="0" rIns="0" bIns="0" rtlCol="0" anchor="ctr"/>
+          <a:lstStyle/>
+          <a:p>
+            <a:pPr indent="0" marL="0">
+              <a:buNone/>
+            </a:pPr>
+            <a:r>
+              <a:rPr lang="en-US" sz="1300" dirty="0">
+                <a:solidFill>
+                  <a:srgbClr val="52606D"/>
+                </a:solidFill>
+                <a:latin typeface="Calibri" pitchFamily="34" charset="0"/>
+                <a:ea typeface="Calibri" pitchFamily="34" charset="-122"/>
+                <a:cs typeface="Calibri" pitchFamily="34" charset="-120"/>
+              </a:rPr>
+              <a:t>contas no plano</a:t>
+            </a:r>
+            <a:endParaRPr lang="en-US" sz="1300" dirty="0"/>
+          </a:p>
+        </p:txBody>
+      </p:sp>
+      <p:sp>
+        <p:nvSpPr>
+          <p:cNvPr id="19" name="Shape 17"/>
+          <p:cNvSpPr/>
+          <p:nvPr/>
+        </p:nvSpPr>
+        <p:spPr>
+          <a:xfrm>
+            <a:off x="8138160" y="3657600"/>
+            <a:ext cx="3520440" cy="1600200"/>
+          </a:xfrm>
+          <a:prstGeom prst="roundRect">
+            <a:avLst>
+              <a:gd name="adj" fmla="val 3429"/>
+            </a:avLst>
+          </a:prstGeom>
+          <a:solidFill>
+            <a:srgbClr val="F4F6F8"/>
+          </a:solidFill>
+          <a:ln w="9525">
+            <a:solidFill>
+              <a:srgbClr val="D9DEE3"/>
+            </a:solidFill>
+            <a:prstDash val="solid"/>
+          </a:ln>
+        </p:spPr>
+      </p:sp>
+      <p:sp>
+        <p:nvSpPr>
+          <p:cNvPr id="20" name="Text 18"/>
+          <p:cNvSpPr txBox="1"/>
+          <p:nvPr/>
+        </p:nvSpPr>
+        <p:spPr>
+          <a:xfrm>
+            <a:off x="8458200" y="3895344"/>
+            <a:ext cx="2926080" cy="749808"/>
+          </a:xfrm>
+          <a:prstGeom prst="rect">
+            <a:avLst/>
+          </a:prstGeom>
+          <a:noFill/>
+          <a:ln/>
+        </p:spPr>
+        <p:txBody>
+          <a:bodyPr wrap="square" lIns="0" tIns="0" rIns="0" bIns="0" rtlCol="0" anchor="ctr"/>
+          <a:lstStyle/>
+          <a:p>
+            <a:pPr indent="0" marL="0">
+              <a:buNone/>
+            </a:pPr>
+            <a:r>
+              <a:rPr lang="en-US" sz="4800" b="1" dirty="0">
+                <a:solidFill>
+                  <a:srgbClr val="1B7A55"/>
+                </a:solidFill>
+                <a:latin typeface="Cambria" pitchFamily="34" charset="0"/>
+                <a:ea typeface="Cambria" pitchFamily="34" charset="-122"/>
+                <a:cs typeface="Cambria" pitchFamily="34" charset="-120"/>
+              </a:rPr>
+              <a:t>0</a:t>
+            </a:r>
+            <a:endParaRPr lang="en-US" sz="4800" dirty="0"/>
+          </a:p>
+        </p:txBody>
+      </p:sp>
+      <p:sp>
+        <p:nvSpPr>
+          <p:cNvPr id="21" name="Text 19"/>
+          <p:cNvSpPr txBox="1"/>
+          <p:nvPr/>
+        </p:nvSpPr>
+        <p:spPr>
+          <a:xfrm>
+            <a:off x="8458200" y="4700016"/>
+            <a:ext cx="2926080" cy="292608"/>
+          </a:xfrm>
+          <a:prstGeom prst="rect">
+            <a:avLst/>
+          </a:prstGeom>
+          <a:noFill/>
+          <a:ln/>
+        </p:spPr>
+        <p:txBody>
+          <a:bodyPr wrap="square" lIns="0" tIns="0" rIns="0" bIns="0" rtlCol="0" anchor="ctr"/>
+          <a:lstStyle/>
+          <a:p>
+            <a:pPr indent="0" marL="0">
+              <a:buNone/>
+            </a:pPr>
+            <a:r>
+              <a:rPr lang="en-US" sz="1300" dirty="0">
+                <a:solidFill>
+                  <a:srgbClr val="52606D"/>
+                </a:solidFill>
+                <a:latin typeface="Calibri" pitchFamily="34" charset="0"/>
+                <a:ea typeface="Calibri" pitchFamily="34" charset="-122"/>
+                <a:cs typeface="Calibri" pitchFamily="34" charset="-120"/>
+              </a:rPr>
+              <a:t>referências órfãs</a:t>
+            </a:r>
+            <a:endParaRPr lang="en-US" sz="1300" dirty="0"/>
+          </a:p>
+        </p:txBody>
+      </p:sp>
+      <p:sp>
+        <p:nvSpPr>
+          <p:cNvPr id="22" name="Text 20"/>
+          <p:cNvSpPr txBox="1"/>
+          <p:nvPr/>
+        </p:nvSpPr>
+        <p:spPr>
+          <a:xfrm>
+            <a:off x="548640" y="5669280"/>
+            <a:ext cx="11064240" cy="548640"/>
+          </a:xfrm>
+          <a:prstGeom prst="rect">
+            <a:avLst/>
+          </a:prstGeom>
+          <a:noFill/>
+          <a:ln/>
+        </p:spPr>
+        <p:txBody>
+          <a:bodyPr wrap="square" lIns="0" tIns="0" rIns="0" bIns="0" rtlCol="0" anchor="ctr"/>
+          <a:lstStyle/>
+          <a:p>
+            <a:pPr indent="0" marL="0">
+              <a:lnSpc>
+                <a:spcPts val="1700"/>
+              </a:lnSpc>
+              <a:buNone/>
+            </a:pPr>
+            <a:r>
+              <a:rPr lang="en-US" sz="1250" dirty="0">
+                <a:solidFill>
+                  <a:srgbClr val="52606D"/>
+                </a:solidFill>
+                <a:latin typeface="Calibri" pitchFamily="34" charset="0"/>
+                <a:ea typeface="Calibri" pitchFamily="34" charset="-122"/>
+                <a:cs typeface="Calibri" pitchFamily="34" charset="-120"/>
+              </a:rPr>
+              <a:t>A taxonomia de exemplo cobre imobilizado, uso e consumo e serviços. Matéria-prima, insumos e produto acabado variam demais entre empresas e entram pela mesma estrutura, quando cada uma adotar.</a:t>
+            </a:r>
+            <a:endParaRPr lang="en-US" sz="1250" dirty="0"/>
+          </a:p>
+        </p:txBody>
+      </p:sp>
+      <p:sp>
+        <p:nvSpPr>
+          <p:cNvPr id="23" name="Text 21"/>
+          <p:cNvSpPr txBox="1"/>
+          <p:nvPr/>
+        </p:nvSpPr>
+        <p:spPr>
+          <a:xfrm>
+            <a:off x="548640" y="6419088"/>
+            <a:ext cx="5486400" cy="219456"/>
+          </a:xfrm>
+          <a:prstGeom prst="rect">
+            <a:avLst/>
+          </a:prstGeom>
+          <a:noFill/>
+          <a:ln/>
+        </p:spPr>
+        <p:txBody>
+          <a:bodyPr wrap="square" lIns="0" tIns="0" rIns="0" bIns="0" rtlCol="0" anchor="ctr"/>
+          <a:lstStyle/>
+          <a:p>
+            <a:pPr indent="0" marL="0">
+              <a:buNone/>
+            </a:pPr>
+            <a:r>
+              <a:rPr lang="en-US" sz="900" dirty="0">
+                <a:solidFill>
+                  <a:srgbClr val="52606D"/>
+                </a:solidFill>
+                <a:latin typeface="Calibri" pitchFamily="34" charset="0"/>
+                <a:ea typeface="Calibri" pitchFamily="34" charset="-122"/>
+                <a:cs typeface="Calibri" pitchFamily="34" charset="-120"/>
+              </a:rPr>
+              <a:t>Classificador Fiscal Inteligente</a:t>
+            </a:r>
+            <a:endParaRPr lang="en-US" sz="900" dirty="0"/>
+          </a:p>
+        </p:txBody>
+      </p:sp>
+      <p:sp>
+        <p:nvSpPr>
+          <p:cNvPr id="24" name="Text 22"/>
+          <p:cNvSpPr txBox="1"/>
+          <p:nvPr/>
+        </p:nvSpPr>
+        <p:spPr>
+          <a:xfrm>
+            <a:off x="11064240" y="6419088"/>
+            <a:ext cx="548640" cy="219456"/>
+          </a:xfrm>
+          <a:prstGeom prst="rect">
+            <a:avLst/>
+          </a:prstGeom>
+          <a:noFill/>
+          <a:ln/>
+        </p:spPr>
+        <p:txBody>
+          <a:bodyPr wrap="square" lIns="0" tIns="0" rIns="0" bIns="0" rtlCol="0" anchor="ctr"/>
+          <a:lstStyle/>
+          <a:p>
+            <a:pPr algn="r" indent="0" marL="0">
+              <a:buNone/>
+            </a:pPr>
+            <a:r>
+              <a:rPr lang="en-US" sz="900" dirty="0">
+                <a:solidFill>
+                  <a:srgbClr val="52606D"/>
+                </a:solidFill>
+                <a:latin typeface="Calibri" pitchFamily="34" charset="0"/>
+                <a:ea typeface="Calibri" pitchFamily="34" charset="-122"/>
+                <a:cs typeface="Calibri" pitchFamily="34" charset="-120"/>
+              </a:rPr>
+              <a:t>13</a:t>
+            </a:r>
+            <a:endParaRPr lang="en-US" sz="900" dirty="0"/>
+          </a:p>
+        </p:txBody>
+      </p:sp>
+    </p:spTree>
+  </p:cSld>
+  <p:clrMapOvr>
+    <a:masterClrMapping/>
+  </p:clrMapOvr>
+</p:sld>
+</file>
+
+<file path=ppt/slides/slide14.xml><?xml version="1.0" encoding="utf-8"?>
+<p:sld xmlns:a="http://schemas.openxmlformats.org/drawingml/2006/main" xmlns:r="http://schemas.openxmlformats.org/officeDocument/2006/relationships" xmlns:p="http://schemas.openxmlformats.org/presentationml/2006/main">
+  <p:cSld name="Slide 14">
     <p:bg>
       <p:bgPr>
         <a:solidFill>
